--- a/发布文档/SAP-AI对话助手-项目介绍-V2.0.pptx
+++ b/发布文档/SAP-AI对话助手-项目介绍-V2.0.pptx
@@ -509,7 +509,7 @@
           <a:p>
             <a:r>
               <a:rPr lang="en-US" dirty="0"/>
-              <a:t>开场：四个维度——技术体系、业务场景与评价、不足、用处与方向。四个数字：5 场景、9 只读工具、22 接口、数据零出内网。</a:t>
+              <a:t>开场：四个维度——技术体系、业务场景与评价、不足、用处与方向。四个数字：4 场景、9 只读工具、22 接口、数据零出内网。</a:t>
             </a:r>
             <a:endParaRPr lang="en-US" dirty="0"/>
           </a:p>
@@ -773,7 +773,7 @@
           <a:p>
             <a:r>
               <a:rPr lang="en-US" dirty="0"/>
-              <a:t>通俗过一遍五场景+典型问法。强调边界规则：宁可拒答也不越界，这是企业场景的信任基础。</a:t>
+              <a:t>通俗过一遍四场景+典型问法（库存类问题走数据分析场景查表）。强调边界规则：宁可拒答也不越界，这是企业场景的信任基础。</a:t>
             </a:r>
             <a:endParaRPr lang="en-US" dirty="0"/>
           </a:p>
@@ -861,7 +861,7 @@
           <a:p>
             <a:r>
               <a:rPr lang="en-US" dirty="0"/>
-              <a:t>逐条念分并给理由：分高的是边界窄而可信的场景；分低的共同原因是依赖登记清单与网关兼容。总评 8.3：可信长板、智能深度短板。</a:t>
+              <a:t>逐条念分并给理由：分高的是边界窄而可信的场景；分低的共同原因是依赖登记清单与网关兼容。总评 8.1：可信长板、智能深度短板。</a:t>
             </a:r>
             <a:endParaRPr lang="en-US" dirty="0"/>
           </a:p>
@@ -1718,7 +1718,7 @@
                 <a:ea typeface="Microsoft YaHei" pitchFamily="34" charset="-122"/>
                 <a:cs typeface="Microsoft YaHei" pitchFamily="34" charset="-120"/>
               </a:rPr>
-              <a:t>5 大</a:t>
+              <a:t>4 大</a:t>
             </a:r>
             <a:endParaRPr lang="en-US" sz="2600" dirty="0"/>
           </a:p>
@@ -4018,7 +4018,7 @@
                 <a:ea typeface="Microsoft YaHei" pitchFamily="34" charset="-122"/>
                 <a:cs typeface="Microsoft YaHei" pitchFamily="34" charset="-120"/>
               </a:rPr>
-              <a:t>9 个白名单工具：库存四件套、SQL、取数、源码</a:t>
+              <a:t>9 个白名单工具：候选解析、受控 SQL、能力取数、源码读取</a:t>
             </a:r>
             <a:endParaRPr lang="en-US" sz="1200" dirty="0"/>
           </a:p>
@@ -4639,7 +4639,7 @@
                 <a:ea typeface="Microsoft YaHei" pitchFamily="34" charset="-122"/>
                 <a:cs typeface="Microsoft YaHei" pitchFamily="34" charset="-120"/>
               </a:rPr>
-              <a:t>五个场景，说人话——每个都配一句典型问法，照着问就能用</a:t>
+              <a:t>四个场景，说人话——每个都配一句典型问法，照着问就能用</a:t>
             </a:r>
             <a:endParaRPr lang="en-US" sz="1150" dirty="0"/>
           </a:p>
@@ -4692,12 +4692,12 @@
         </p:nvSpPr>
         <p:spPr>
           <a:xfrm>
-            <a:off x="457200" y="1371600"/>
-            <a:ext cx="2130552" cy="3246120"/>
+            <a:off x="457200" y="1417320"/>
+            <a:ext cx="2695194" cy="3154680"/>
           </a:xfrm>
           <a:prstGeom prst="roundRect">
             <a:avLst>
-              <a:gd name="adj" fmla="val 3863"/>
+              <a:gd name="adj" fmla="val 3053"/>
             </a:avLst>
           </a:prstGeom>
           <a:solidFill>
@@ -4719,7 +4719,7 @@
         </p:nvSpPr>
         <p:spPr>
           <a:xfrm>
-            <a:off x="1284732" y="1609344"/>
+            <a:off x="1567053" y="1655064"/>
             <a:ext cx="475488" cy="475488"/>
           </a:xfrm>
           <a:prstGeom prst="ellipse">
@@ -4739,7 +4739,7 @@
         </p:nvSpPr>
         <p:spPr>
           <a:xfrm>
-            <a:off x="1284732" y="1609344"/>
+            <a:off x="1567053" y="1655064"/>
             <a:ext cx="475488" cy="475488"/>
           </a:xfrm>
           <a:prstGeom prst="rect">
@@ -4778,8 +4778,8 @@
         </p:nvSpPr>
         <p:spPr>
           <a:xfrm>
-            <a:off x="548640" y="2194560"/>
-            <a:ext cx="1947672" cy="384048"/>
+            <a:off x="548640" y="2240280"/>
+            <a:ext cx="2512314" cy="384048"/>
           </a:xfrm>
           <a:prstGeom prst="rect">
             <a:avLst/>
@@ -4795,7 +4795,7 @@
               <a:buNone/>
             </a:pPr>
             <a:r>
-              <a:rPr lang="en-US" sz="1500" b="1" dirty="0">
+              <a:rPr lang="en-US" sz="1550" b="1" dirty="0">
                 <a:solidFill>
                   <a:srgbClr val="133559"/>
                 </a:solidFill>
@@ -4805,7 +4805,7 @@
               </a:rPr>
               <a:t>普通对话</a:t>
             </a:r>
-            <a:endParaRPr lang="en-US" sz="1500" dirty="0"/>
+            <a:endParaRPr lang="en-US" sz="1550" dirty="0"/>
           </a:p>
         </p:txBody>
       </p:sp>
@@ -4817,8 +4817,8 @@
         </p:nvSpPr>
         <p:spPr>
           <a:xfrm>
-            <a:off x="640080" y="2651760"/>
-            <a:ext cx="1764792" cy="1051560"/>
+            <a:off x="676656" y="2715768"/>
+            <a:ext cx="2256282" cy="1005840"/>
           </a:xfrm>
           <a:prstGeom prst="rect">
             <a:avLst/>
@@ -4837,7 +4837,7 @@
               <a:buNone/>
             </a:pPr>
             <a:r>
-              <a:rPr lang="en-US" sz="1000" dirty="0">
+              <a:rPr lang="en-US" sz="1050" dirty="0">
                 <a:solidFill>
                   <a:srgbClr val="5F7183"/>
                 </a:solidFill>
@@ -4847,7 +4847,7 @@
               </a:rPr>
               <a:t>内网版 ChatGPT：写代码、改代码、翻译、写文档，啥都能聊</a:t>
             </a:r>
-            <a:endParaRPr lang="en-US" sz="1000" dirty="0"/>
+            <a:endParaRPr lang="en-US" sz="1050" dirty="0"/>
           </a:p>
         </p:txBody>
       </p:sp>
@@ -4859,8 +4859,8 @@
         </p:nvSpPr>
         <p:spPr>
           <a:xfrm>
-            <a:off x="640080" y="3749040"/>
-            <a:ext cx="1764792" cy="777240"/>
+            <a:off x="676656" y="3749040"/>
+            <a:ext cx="2256282" cy="731520"/>
           </a:xfrm>
           <a:prstGeom prst="rect">
             <a:avLst/>
@@ -4879,7 +4879,7 @@
               <a:buNone/>
             </a:pPr>
             <a:r>
-              <a:rPr lang="en-US" sz="950" i="1" dirty="0">
+              <a:rPr lang="en-US" sz="1000" i="1" dirty="0">
                 <a:solidFill>
                   <a:srgbClr val="0A6ED1"/>
                 </a:solidFill>
@@ -4889,7 +4889,7 @@
               </a:rPr>
               <a:t>“帮我把这段内表循环改成新语法”</a:t>
             </a:r>
-            <a:endParaRPr lang="en-US" sz="950" dirty="0"/>
+            <a:endParaRPr lang="en-US" sz="1000" dirty="0"/>
           </a:p>
         </p:txBody>
       </p:sp>
@@ -4901,12 +4901,12 @@
         </p:nvSpPr>
         <p:spPr>
           <a:xfrm>
-            <a:off x="2734056" y="1371600"/>
-            <a:ext cx="2130552" cy="3246120"/>
+            <a:off x="3316986" y="1417320"/>
+            <a:ext cx="2695194" cy="3154680"/>
           </a:xfrm>
           <a:prstGeom prst="roundRect">
             <a:avLst>
-              <a:gd name="adj" fmla="val 3863"/>
+              <a:gd name="adj" fmla="val 3053"/>
             </a:avLst>
           </a:prstGeom>
           <a:solidFill>
@@ -4928,7 +4928,7 @@
         </p:nvSpPr>
         <p:spPr>
           <a:xfrm>
-            <a:off x="3561588" y="1609344"/>
+            <a:off x="4426839" y="1655064"/>
             <a:ext cx="475488" cy="475488"/>
           </a:xfrm>
           <a:prstGeom prst="ellipse">
@@ -4948,7 +4948,7 @@
         </p:nvSpPr>
         <p:spPr>
           <a:xfrm>
-            <a:off x="3561588" y="1609344"/>
+            <a:off x="4426839" y="1655064"/>
             <a:ext cx="475488" cy="475488"/>
           </a:xfrm>
           <a:prstGeom prst="rect">
@@ -4987,8 +4987,8 @@
         </p:nvSpPr>
         <p:spPr>
           <a:xfrm>
-            <a:off x="2825496" y="2194560"/>
-            <a:ext cx="1947672" cy="384048"/>
+            <a:off x="3408426" y="2240280"/>
+            <a:ext cx="2512314" cy="384048"/>
           </a:xfrm>
           <a:prstGeom prst="rect">
             <a:avLst/>
@@ -5004,7 +5004,7 @@
               <a:buNone/>
             </a:pPr>
             <a:r>
-              <a:rPr lang="en-US" sz="1500" b="1" dirty="0">
+              <a:rPr lang="en-US" sz="1550" b="1" dirty="0">
                 <a:solidFill>
                   <a:srgbClr val="133559"/>
                 </a:solidFill>
@@ -5014,7 +5014,7 @@
               </a:rPr>
               <a:t>代码分析</a:t>
             </a:r>
-            <a:endParaRPr lang="en-US" sz="1500" dirty="0"/>
+            <a:endParaRPr lang="en-US" sz="1550" dirty="0"/>
           </a:p>
         </p:txBody>
       </p:sp>
@@ -5026,8 +5026,8 @@
         </p:nvSpPr>
         <p:spPr>
           <a:xfrm>
-            <a:off x="2916936" y="2651760"/>
-            <a:ext cx="1764792" cy="1051560"/>
+            <a:off x="3536442" y="2715768"/>
+            <a:ext cx="2256282" cy="1005840"/>
           </a:xfrm>
           <a:prstGeom prst="rect">
             <a:avLst/>
@@ -5046,7 +5046,7 @@
               <a:buNone/>
             </a:pPr>
             <a:r>
-              <a:rPr lang="en-US" sz="1000" dirty="0">
+              <a:rPr lang="en-US" sz="1050" dirty="0">
                 <a:solidFill>
                   <a:srgbClr val="5F7183"/>
                 </a:solidFill>
@@ -5056,7 +5056,7 @@
               </a:rPr>
               <a:t>丢一个程序名，它自己去读源码，讲清楚逻辑和字段</a:t>
             </a:r>
-            <a:endParaRPr lang="en-US" sz="1000" dirty="0"/>
+            <a:endParaRPr lang="en-US" sz="1050" dirty="0"/>
           </a:p>
         </p:txBody>
       </p:sp>
@@ -5068,8 +5068,8 @@
         </p:nvSpPr>
         <p:spPr>
           <a:xfrm>
-            <a:off x="2916936" y="3749040"/>
-            <a:ext cx="1764792" cy="777240"/>
+            <a:off x="3536442" y="3749040"/>
+            <a:ext cx="2256282" cy="731520"/>
           </a:xfrm>
           <a:prstGeom prst="rect">
             <a:avLst/>
@@ -5088,7 +5088,7 @@
               <a:buNone/>
             </a:pPr>
             <a:r>
-              <a:rPr lang="en-US" sz="950" i="1" dirty="0">
+              <a:rPr lang="en-US" sz="1000" i="1" dirty="0">
                 <a:solidFill>
                   <a:srgbClr val="0A6ED1"/>
                 </a:solidFill>
@@ -5098,7 +5098,7 @@
               </a:rPr>
               <a:t>“ZRMM_IDP_0702 这个程序是干嘛的？”</a:t>
             </a:r>
-            <a:endParaRPr lang="en-US" sz="950" dirty="0"/>
+            <a:endParaRPr lang="en-US" sz="1000" dirty="0"/>
           </a:p>
         </p:txBody>
       </p:sp>
@@ -5110,12 +5110,12 @@
         </p:nvSpPr>
         <p:spPr>
           <a:xfrm>
-            <a:off x="5010912" y="1371600"/>
-            <a:ext cx="2130552" cy="3246120"/>
+            <a:off x="6176772" y="1417320"/>
+            <a:ext cx="2695194" cy="3154680"/>
           </a:xfrm>
           <a:prstGeom prst="roundRect">
             <a:avLst>
-              <a:gd name="adj" fmla="val 3863"/>
+              <a:gd name="adj" fmla="val 3053"/>
             </a:avLst>
           </a:prstGeom>
           <a:solidFill>
@@ -5137,7 +5137,7 @@
         </p:nvSpPr>
         <p:spPr>
           <a:xfrm>
-            <a:off x="5838444" y="1609344"/>
+            <a:off x="7286625" y="1655064"/>
             <a:ext cx="475488" cy="475488"/>
           </a:xfrm>
           <a:prstGeom prst="ellipse">
@@ -5157,7 +5157,7 @@
         </p:nvSpPr>
         <p:spPr>
           <a:xfrm>
-            <a:off x="5838444" y="1609344"/>
+            <a:off x="7286625" y="1655064"/>
             <a:ext cx="475488" cy="475488"/>
           </a:xfrm>
           <a:prstGeom prst="rect">
@@ -5196,8 +5196,8 @@
         </p:nvSpPr>
         <p:spPr>
           <a:xfrm>
-            <a:off x="5102352" y="2194560"/>
-            <a:ext cx="1947672" cy="384048"/>
+            <a:off x="6268212" y="2240280"/>
+            <a:ext cx="2512314" cy="384048"/>
           </a:xfrm>
           <a:prstGeom prst="rect">
             <a:avLst/>
@@ -5213,7 +5213,7 @@
               <a:buNone/>
             </a:pPr>
             <a:r>
-              <a:rPr lang="en-US" sz="1500" b="1" dirty="0">
+              <a:rPr lang="en-US" sz="1550" b="1" dirty="0">
                 <a:solidFill>
                   <a:srgbClr val="133559"/>
                 </a:solidFill>
@@ -5223,7 +5223,7 @@
               </a:rPr>
               <a:t>数据分析</a:t>
             </a:r>
-            <a:endParaRPr lang="en-US" sz="1500" dirty="0"/>
+            <a:endParaRPr lang="en-US" sz="1550" dirty="0"/>
           </a:p>
         </p:txBody>
       </p:sp>
@@ -5235,8 +5235,8 @@
         </p:nvSpPr>
         <p:spPr>
           <a:xfrm>
-            <a:off x="5193792" y="2651760"/>
-            <a:ext cx="1764792" cy="1051560"/>
+            <a:off x="6396228" y="2715768"/>
+            <a:ext cx="2256282" cy="1005840"/>
           </a:xfrm>
           <a:prstGeom prst="rect">
             <a:avLst/>
@@ -5255,7 +5255,7 @@
               <a:buNone/>
             </a:pPr>
             <a:r>
-              <a:rPr lang="en-US" sz="1000" dirty="0">
+              <a:rPr lang="en-US" sz="1050" dirty="0">
                 <a:solidFill>
                   <a:srgbClr val="5F7183"/>
                 </a:solidFill>
@@ -5265,7 +5265,7 @@
               </a:rPr>
               <a:t>像问 Excel 一样问 SAP 表，答案带表格和图表</a:t>
             </a:r>
-            <a:endParaRPr lang="en-US" sz="1000" dirty="0"/>
+            <a:endParaRPr lang="en-US" sz="1050" dirty="0"/>
           </a:p>
         </p:txBody>
       </p:sp>
@@ -5277,8 +5277,8 @@
         </p:nvSpPr>
         <p:spPr>
           <a:xfrm>
-            <a:off x="5193792" y="3749040"/>
-            <a:ext cx="1764792" cy="777240"/>
+            <a:off x="6396228" y="3749040"/>
+            <a:ext cx="2256282" cy="731520"/>
           </a:xfrm>
           <a:prstGeom prst="rect">
             <a:avLst/>
@@ -5297,7 +5297,7 @@
               <a:buNone/>
             </a:pPr>
             <a:r>
-              <a:rPr lang="en-US" sz="950" i="1" dirty="0">
+              <a:rPr lang="en-US" sz="1000" i="1" dirty="0">
                 <a:solidFill>
                   <a:srgbClr val="0A6ED1"/>
                 </a:solidFill>
@@ -5307,7 +5307,7 @@
               </a:rPr>
               <a:t>“按工厂统计物料数，画个柱状图”</a:t>
             </a:r>
-            <a:endParaRPr lang="en-US" sz="950" dirty="0"/>
+            <a:endParaRPr lang="en-US" sz="1000" dirty="0"/>
           </a:p>
         </p:txBody>
       </p:sp>
@@ -5319,12 +5319,12 @@
         </p:nvSpPr>
         <p:spPr>
           <a:xfrm>
-            <a:off x="7287768" y="1371600"/>
-            <a:ext cx="2130552" cy="3246120"/>
+            <a:off x="9036558" y="1417320"/>
+            <a:ext cx="2695194" cy="3154680"/>
           </a:xfrm>
           <a:prstGeom prst="roundRect">
             <a:avLst>
-              <a:gd name="adj" fmla="val 3863"/>
+              <a:gd name="adj" fmla="val 3053"/>
             </a:avLst>
           </a:prstGeom>
           <a:solidFill>
@@ -5346,7 +5346,7 @@
         </p:nvSpPr>
         <p:spPr>
           <a:xfrm>
-            <a:off x="8115300" y="1609344"/>
+            <a:off x="10146411" y="1655064"/>
             <a:ext cx="475488" cy="475488"/>
           </a:xfrm>
           <a:prstGeom prst="ellipse">
@@ -5366,7 +5366,7 @@
         </p:nvSpPr>
         <p:spPr>
           <a:xfrm>
-            <a:off x="8115300" y="1609344"/>
+            <a:off x="10146411" y="1655064"/>
             <a:ext cx="475488" cy="475488"/>
           </a:xfrm>
           <a:prstGeom prst="rect">
@@ -5405,8 +5405,8 @@
         </p:nvSpPr>
         <p:spPr>
           <a:xfrm>
-            <a:off x="7379208" y="2194560"/>
-            <a:ext cx="1947672" cy="384048"/>
+            <a:off x="9127998" y="2240280"/>
+            <a:ext cx="2512314" cy="384048"/>
           </a:xfrm>
           <a:prstGeom prst="rect">
             <a:avLst/>
@@ -5422,7 +5422,7 @@
               <a:buNone/>
             </a:pPr>
             <a:r>
-              <a:rPr lang="en-US" sz="1500" b="1" dirty="0">
+              <a:rPr lang="en-US" sz="1550" b="1" dirty="0">
                 <a:solidFill>
                   <a:srgbClr val="133559"/>
                 </a:solidFill>
@@ -5430,9 +5430,9 @@
                 <a:ea typeface="Microsoft YaHei" pitchFamily="34" charset="-122"/>
                 <a:cs typeface="Microsoft YaHei" pitchFamily="34" charset="-120"/>
               </a:rPr>
-              <a:t>库存查询</a:t>
-            </a:r>
-            <a:endParaRPr lang="en-US" sz="1500" dirty="0"/>
+              <a:t>报表执行</a:t>
+            </a:r>
+            <a:endParaRPr lang="en-US" sz="1550" dirty="0"/>
           </a:p>
         </p:txBody>
       </p:sp>
@@ -5444,8 +5444,8 @@
         </p:nvSpPr>
         <p:spPr>
           <a:xfrm>
-            <a:off x="7470648" y="2651760"/>
-            <a:ext cx="1764792" cy="1051560"/>
+            <a:off x="9256014" y="2715768"/>
+            <a:ext cx="2256282" cy="1005840"/>
           </a:xfrm>
           <a:prstGeom prst="rect">
             <a:avLst/>
@@ -5464,7 +5464,7 @@
               <a:buNone/>
             </a:pPr>
             <a:r>
-              <a:rPr lang="en-US" sz="1000" dirty="0">
+              <a:rPr lang="en-US" sz="1050" dirty="0">
                 <a:solidFill>
                   <a:srgbClr val="5F7183"/>
                 </a:solidFill>
@@ -5472,9 +5472,9 @@
                 <a:ea typeface="Microsoft YaHei" pitchFamily="34" charset="-122"/>
                 <a:cs typeface="Microsoft YaHei" pitchFamily="34" charset="-120"/>
               </a:rPr>
-              <a:t>问库存余量、批次、最近收发，数字直接来自 SAP</a:t>
-            </a:r>
-            <a:endParaRPr lang="en-US" sz="1000" dirty="0"/>
+              <a:t>平时手动跑的老报表交给它，跑完还能继续追问</a:t>
+            </a:r>
+            <a:endParaRPr lang="en-US" sz="1050" dirty="0"/>
           </a:p>
         </p:txBody>
       </p:sp>
@@ -5486,8 +5486,8 @@
         </p:nvSpPr>
         <p:spPr>
           <a:xfrm>
-            <a:off x="7470648" y="3749040"/>
-            <a:ext cx="1764792" cy="777240"/>
+            <a:off x="9256014" y="3749040"/>
+            <a:ext cx="2256282" cy="731520"/>
           </a:xfrm>
           <a:prstGeom prst="rect">
             <a:avLst/>
@@ -5506,7 +5506,7 @@
               <a:buNone/>
             </a:pPr>
             <a:r>
-              <a:rPr lang="en-US" sz="950" i="1" dirty="0">
+              <a:rPr lang="en-US" sz="1000" i="1" dirty="0">
                 <a:solidFill>
                   <a:srgbClr val="0A6ED1"/>
                 </a:solidFill>
@@ -5514,9 +5514,9 @@
                 <a:ea typeface="Microsoft YaHei" pitchFamily="34" charset="-122"/>
                 <a:cs typeface="Microsoft YaHei" pitchFamily="34" charset="-120"/>
               </a:rPr>
-              <a:t>“这个料在各仓库还剩多少？”</a:t>
-            </a:r>
-            <a:endParaRPr lang="en-US" sz="950" dirty="0"/>
+              <a:t>“跑一下 ZRMM_IDP_0702，工厂 1000”</a:t>
+            </a:r>
+            <a:endParaRPr lang="en-US" sz="1000" dirty="0"/>
           </a:p>
         </p:txBody>
       </p:sp>
@@ -5528,16 +5528,16 @@
         </p:nvSpPr>
         <p:spPr>
           <a:xfrm>
-            <a:off x="9564624" y="1371600"/>
-            <a:ext cx="2130552" cy="3246120"/>
+            <a:off x="457200" y="4892040"/>
+            <a:ext cx="11274552" cy="1143000"/>
           </a:xfrm>
           <a:prstGeom prst="roundRect">
             <a:avLst>
-              <a:gd name="adj" fmla="val 3863"/>
+              <a:gd name="adj" fmla="val 7200"/>
             </a:avLst>
           </a:prstGeom>
           <a:solidFill>
-            <a:srgbClr val="FFFFFF"/>
+            <a:srgbClr val="F2F7FD"/>
           </a:solidFill>
           <a:ln w="12700">
             <a:solidFill>
@@ -5549,216 +5549,7 @@
       </p:sp>
       <p:sp>
         <p:nvSpPr>
-          <p:cNvPr id="32" name="Shape 30"/>
-          <p:cNvSpPr/>
-          <p:nvPr/>
-        </p:nvSpPr>
-        <p:spPr>
-          <a:xfrm>
-            <a:off x="10392156" y="1609344"/>
-            <a:ext cx="475488" cy="475488"/>
-          </a:xfrm>
-          <a:prstGeom prst="ellipse">
-            <a:avLst/>
-          </a:prstGeom>
-          <a:solidFill>
-            <a:srgbClr val="0A6ED1"/>
-          </a:solidFill>
-          <a:ln/>
-        </p:spPr>
-      </p:sp>
-      <p:sp>
-        <p:nvSpPr>
-          <p:cNvPr id="33" name="Text 31"/>
-          <p:cNvSpPr/>
-          <p:nvPr/>
-        </p:nvSpPr>
-        <p:spPr>
-          <a:xfrm>
-            <a:off x="10392156" y="1609344"/>
-            <a:ext cx="475488" cy="475488"/>
-          </a:xfrm>
-          <a:prstGeom prst="rect">
-            <a:avLst/>
-          </a:prstGeom>
-          <a:noFill/>
-          <a:ln/>
-        </p:spPr>
-        <p:txBody>
-          <a:bodyPr wrap="square" lIns="0" tIns="0" rIns="0" bIns="0" rtlCol="0" anchor="ctr"/>
-          <a:lstStyle/>
-          <a:p>
-            <a:pPr algn="ctr" indent="0" marL="0">
-              <a:buNone/>
-            </a:pPr>
-            <a:r>
-              <a:rPr lang="en-US" sz="1800" b="1" dirty="0">
-                <a:solidFill>
-                  <a:srgbClr val="FFFFFF"/>
-                </a:solidFill>
-                <a:latin typeface="Microsoft YaHei" pitchFamily="34" charset="0"/>
-                <a:ea typeface="Microsoft YaHei" pitchFamily="34" charset="-122"/>
-                <a:cs typeface="Microsoft YaHei" pitchFamily="34" charset="-120"/>
-              </a:rPr>
-              <a:t>5</a:t>
-            </a:r>
-            <a:endParaRPr lang="en-US" sz="1800" dirty="0"/>
-          </a:p>
-        </p:txBody>
-      </p:sp>
-      <p:sp>
-        <p:nvSpPr>
-          <p:cNvPr id="34" name="Text 32"/>
-          <p:cNvSpPr/>
-          <p:nvPr/>
-        </p:nvSpPr>
-        <p:spPr>
-          <a:xfrm>
-            <a:off x="9656064" y="2194560"/>
-            <a:ext cx="1947672" cy="384048"/>
-          </a:xfrm>
-          <a:prstGeom prst="rect">
-            <a:avLst/>
-          </a:prstGeom>
-          <a:noFill/>
-          <a:ln/>
-        </p:spPr>
-        <p:txBody>
-          <a:bodyPr wrap="square" lIns="0" tIns="0" rIns="0" bIns="0" rtlCol="0" anchor="ctr"/>
-          <a:lstStyle/>
-          <a:p>
-            <a:pPr algn="ctr" indent="0" marL="0">
-              <a:buNone/>
-            </a:pPr>
-            <a:r>
-              <a:rPr lang="en-US" sz="1500" b="1" dirty="0">
-                <a:solidFill>
-                  <a:srgbClr val="133559"/>
-                </a:solidFill>
-                <a:latin typeface="Microsoft YaHei" pitchFamily="34" charset="0"/>
-                <a:ea typeface="Microsoft YaHei" pitchFamily="34" charset="-122"/>
-                <a:cs typeface="Microsoft YaHei" pitchFamily="34" charset="-120"/>
-              </a:rPr>
-              <a:t>报表执行</a:t>
-            </a:r>
-            <a:endParaRPr lang="en-US" sz="1500" dirty="0"/>
-          </a:p>
-        </p:txBody>
-      </p:sp>
-      <p:sp>
-        <p:nvSpPr>
-          <p:cNvPr id="35" name="Text 33"/>
-          <p:cNvSpPr/>
-          <p:nvPr/>
-        </p:nvSpPr>
-        <p:spPr>
-          <a:xfrm>
-            <a:off x="9747504" y="2651760"/>
-            <a:ext cx="1764792" cy="1051560"/>
-          </a:xfrm>
-          <a:prstGeom prst="rect">
-            <a:avLst/>
-          </a:prstGeom>
-          <a:noFill/>
-          <a:ln/>
-        </p:spPr>
-        <p:txBody>
-          <a:bodyPr wrap="square" lIns="0" tIns="0" rIns="0" bIns="0" rtlCol="0" anchor="t"/>
-          <a:lstStyle/>
-          <a:p>
-            <a:pPr algn="l" indent="0" marL="0">
-              <a:lnSpc>
-                <a:spcPct val="125000"/>
-              </a:lnSpc>
-              <a:buNone/>
-            </a:pPr>
-            <a:r>
-              <a:rPr lang="en-US" sz="1000" dirty="0">
-                <a:solidFill>
-                  <a:srgbClr val="5F7183"/>
-                </a:solidFill>
-                <a:latin typeface="Microsoft YaHei" pitchFamily="34" charset="0"/>
-                <a:ea typeface="Microsoft YaHei" pitchFamily="34" charset="-122"/>
-                <a:cs typeface="Microsoft YaHei" pitchFamily="34" charset="-120"/>
-              </a:rPr>
-              <a:t>平时手动跑的老报表交给它，跑完还能继续追问</a:t>
-            </a:r>
-            <a:endParaRPr lang="en-US" sz="1000" dirty="0"/>
-          </a:p>
-        </p:txBody>
-      </p:sp>
-      <p:sp>
-        <p:nvSpPr>
-          <p:cNvPr id="36" name="Text 34"/>
-          <p:cNvSpPr/>
-          <p:nvPr/>
-        </p:nvSpPr>
-        <p:spPr>
-          <a:xfrm>
-            <a:off x="9747504" y="3749040"/>
-            <a:ext cx="1764792" cy="777240"/>
-          </a:xfrm>
-          <a:prstGeom prst="rect">
-            <a:avLst/>
-          </a:prstGeom>
-          <a:noFill/>
-          <a:ln/>
-        </p:spPr>
-        <p:txBody>
-          <a:bodyPr wrap="square" lIns="0" tIns="0" rIns="0" bIns="0" rtlCol="0" anchor="t"/>
-          <a:lstStyle/>
-          <a:p>
-            <a:pPr algn="l" indent="0" marL="0">
-              <a:lnSpc>
-                <a:spcPct val="120000"/>
-              </a:lnSpc>
-              <a:buNone/>
-            </a:pPr>
-            <a:r>
-              <a:rPr lang="en-US" sz="950" i="1" dirty="0">
-                <a:solidFill>
-                  <a:srgbClr val="0A6ED1"/>
-                </a:solidFill>
-                <a:latin typeface="Microsoft YaHei" pitchFamily="34" charset="0"/>
-                <a:ea typeface="Microsoft YaHei" pitchFamily="34" charset="-122"/>
-                <a:cs typeface="Microsoft YaHei" pitchFamily="34" charset="-120"/>
-              </a:rPr>
-              <a:t>“跑一下 ZRMM_IDP_0702，工厂 1000”</a:t>
-            </a:r>
-            <a:endParaRPr lang="en-US" sz="950" dirty="0"/>
-          </a:p>
-        </p:txBody>
-      </p:sp>
-      <p:sp>
-        <p:nvSpPr>
-          <p:cNvPr id="37" name="Shape 35"/>
-          <p:cNvSpPr/>
-          <p:nvPr/>
-        </p:nvSpPr>
-        <p:spPr>
-          <a:xfrm>
-            <a:off x="457200" y="4892040"/>
-            <a:ext cx="11274552" cy="1143000"/>
-          </a:xfrm>
-          <a:prstGeom prst="roundRect">
-            <a:avLst>
-              <a:gd name="adj" fmla="val 7200"/>
-            </a:avLst>
-          </a:prstGeom>
-          <a:solidFill>
-            <a:srgbClr val="F2F7FD"/>
-          </a:solidFill>
-          <a:ln w="12700">
-            <a:solidFill>
-              <a:srgbClr val="C9D6E4"/>
-            </a:solidFill>
-            <a:prstDash val="solid"/>
-          </a:ln>
-        </p:spPr>
-      </p:sp>
-      <p:sp>
-        <p:nvSpPr>
-          <p:cNvPr id="38" name="Text 36"/>
+          <p:cNvPr id="32" name="Text 30"/>
           <p:cNvSpPr/>
           <p:nvPr/>
         </p:nvSpPr>
@@ -6006,8 +5797,8 @@
         </p:nvSpPr>
         <p:spPr>
           <a:xfrm>
-            <a:off x="457200" y="1481328"/>
-            <a:ext cx="1965960" cy="603504"/>
+            <a:off x="457200" y="1600200"/>
+            <a:ext cx="1965960" cy="658368"/>
           </a:xfrm>
           <a:prstGeom prst="rect">
             <a:avLst/>
@@ -6031,7 +5822,7 @@
                 <a:ea typeface="Microsoft YaHei" pitchFamily="34" charset="-122"/>
                 <a:cs typeface="Microsoft YaHei" pitchFamily="34" charset="-120"/>
               </a:rPr>
-              <a:t>库存查询</a:t>
+              <a:t>普通对话</a:t>
             </a:r>
             <a:endParaRPr lang="en-US" sz="1250" dirty="0"/>
           </a:p>
@@ -6045,7 +5836,7 @@
         </p:nvSpPr>
         <p:spPr>
           <a:xfrm>
-            <a:off x="2514600" y="1691640"/>
+            <a:off x="2514600" y="1837944"/>
             <a:ext cx="3017520" cy="182880"/>
           </a:xfrm>
           <a:prstGeom prst="roundRect">
@@ -6067,7 +5858,7 @@
         </p:nvSpPr>
         <p:spPr>
           <a:xfrm>
-            <a:off x="2514600" y="1691640"/>
+            <a:off x="2514600" y="1837944"/>
             <a:ext cx="2715768" cy="182880"/>
           </a:xfrm>
           <a:prstGeom prst="roundRect">
@@ -6089,8 +5880,8 @@
         </p:nvSpPr>
         <p:spPr>
           <a:xfrm>
-            <a:off x="5641848" y="1481328"/>
-            <a:ext cx="777240" cy="603504"/>
+            <a:off x="5641848" y="1600200"/>
+            <a:ext cx="777240" cy="658368"/>
           </a:xfrm>
           <a:prstGeom prst="rect">
             <a:avLst/>
@@ -6128,8 +5919,8 @@
         </p:nvSpPr>
         <p:spPr>
           <a:xfrm>
-            <a:off x="6583680" y="1481328"/>
-            <a:ext cx="5212080" cy="603504"/>
+            <a:off x="6583680" y="1600200"/>
+            <a:ext cx="5212080" cy="658368"/>
           </a:xfrm>
           <a:prstGeom prst="rect">
             <a:avLst/>
@@ -6156,7 +5947,7 @@
                 <a:ea typeface="Microsoft YaHei" pitchFamily="34" charset="-122"/>
                 <a:cs typeface="Microsoft YaHei" pitchFamily="34" charset="-120"/>
               </a:rPr>
-              <a:t>范围窄但最稳：四个只读工具直连 MARA/MARD/MSEG/MCHB，数字可信、几乎不会错</a:t>
+              <a:t>体验对标商用 AI 产品：渲染/停止/角色/附件齐全；扣分点是等待感（无真流式）</a:t>
             </a:r>
             <a:endParaRPr lang="en-US" sz="980" dirty="0"/>
           </a:p>
@@ -6170,8 +5961,8 @@
         </p:nvSpPr>
         <p:spPr>
           <a:xfrm>
-            <a:off x="457200" y="2084832"/>
-            <a:ext cx="1965960" cy="603504"/>
+            <a:off x="457200" y="2258568"/>
+            <a:ext cx="1965960" cy="658368"/>
           </a:xfrm>
           <a:prstGeom prst="rect">
             <a:avLst/>
@@ -6195,7 +5986,7 @@
                 <a:ea typeface="Microsoft YaHei" pitchFamily="34" charset="-122"/>
                 <a:cs typeface="Microsoft YaHei" pitchFamily="34" charset="-120"/>
               </a:rPr>
-              <a:t>普通对话</a:t>
+              <a:t>Agent 测评（管理）</a:t>
             </a:r>
             <a:endParaRPr lang="en-US" sz="1250" dirty="0"/>
           </a:p>
@@ -6209,7 +6000,7 @@
         </p:nvSpPr>
         <p:spPr>
           <a:xfrm>
-            <a:off x="2514600" y="2295144"/>
+            <a:off x="2514600" y="2496312"/>
             <a:ext cx="3017520" cy="182880"/>
           </a:xfrm>
           <a:prstGeom prst="roundRect">
@@ -6231,8 +6022,8 @@
         </p:nvSpPr>
         <p:spPr>
           <a:xfrm>
-            <a:off x="2514600" y="2295144"/>
-            <a:ext cx="2715768" cy="182880"/>
+            <a:off x="2514600" y="2496312"/>
+            <a:ext cx="2564892" cy="182880"/>
           </a:xfrm>
           <a:prstGeom prst="roundRect">
             <a:avLst>
@@ -6253,8 +6044,8 @@
         </p:nvSpPr>
         <p:spPr>
           <a:xfrm>
-            <a:off x="5641848" y="2084832"/>
-            <a:ext cx="777240" cy="603504"/>
+            <a:off x="5641848" y="2258568"/>
+            <a:ext cx="777240" cy="658368"/>
           </a:xfrm>
           <a:prstGeom prst="rect">
             <a:avLst/>
@@ -6278,7 +6069,7 @@
                 <a:ea typeface="Microsoft YaHei" pitchFamily="34" charset="-122"/>
                 <a:cs typeface="Microsoft YaHei" pitchFamily="34" charset="-120"/>
               </a:rPr>
-              <a:t>9.0</a:t>
+              <a:t>8.5</a:t>
             </a:r>
             <a:endParaRPr lang="en-US" sz="1400" dirty="0"/>
           </a:p>
@@ -6292,8 +6083,8 @@
         </p:nvSpPr>
         <p:spPr>
           <a:xfrm>
-            <a:off x="6583680" y="2084832"/>
-            <a:ext cx="5212080" cy="603504"/>
+            <a:off x="6583680" y="2258568"/>
+            <a:ext cx="5212080" cy="658368"/>
           </a:xfrm>
           <a:prstGeom prst="rect">
             <a:avLst/>
@@ -6320,7 +6111,7 @@
                 <a:ea typeface="Microsoft YaHei" pitchFamily="34" charset="-122"/>
                 <a:cs typeface="Microsoft YaHei" pitchFamily="34" charset="-120"/>
               </a:rPr>
-              <a:t>体验对标商用 AI 产品：渲染/停止/角色/附件齐全；扣分点是等待感（无真流式）</a:t>
+              <a:t>工程亮点：29 题走真实链路、先测再改；题量还小，未成回归门禁</a:t>
             </a:r>
             <a:endParaRPr lang="en-US" sz="980" dirty="0"/>
           </a:p>
@@ -6334,8 +6125,8 @@
         </p:nvSpPr>
         <p:spPr>
           <a:xfrm>
-            <a:off x="457200" y="2688336"/>
-            <a:ext cx="1965960" cy="603504"/>
+            <a:off x="457200" y="2916936"/>
+            <a:ext cx="1965960" cy="658368"/>
           </a:xfrm>
           <a:prstGeom prst="rect">
             <a:avLst/>
@@ -6359,7 +6150,7 @@
                 <a:ea typeface="Microsoft YaHei" pitchFamily="34" charset="-122"/>
                 <a:cs typeface="Microsoft YaHei" pitchFamily="34" charset="-120"/>
               </a:rPr>
-              <a:t>Agent 测评（管理）</a:t>
+              <a:t>代码分析</a:t>
             </a:r>
             <a:endParaRPr lang="en-US" sz="1250" dirty="0"/>
           </a:p>
@@ -6373,7 +6164,7 @@
         </p:nvSpPr>
         <p:spPr>
           <a:xfrm>
-            <a:off x="2514600" y="2898648"/>
+            <a:off x="2514600" y="3154680"/>
             <a:ext cx="3017520" cy="182880"/>
           </a:xfrm>
           <a:prstGeom prst="roundRect">
@@ -6395,8 +6186,8 @@
         </p:nvSpPr>
         <p:spPr>
           <a:xfrm>
-            <a:off x="2514600" y="2898648"/>
-            <a:ext cx="2564892" cy="182880"/>
+            <a:off x="2514600" y="3154680"/>
+            <a:ext cx="2414016" cy="182880"/>
           </a:xfrm>
           <a:prstGeom prst="roundRect">
             <a:avLst>
@@ -6404,7 +6195,7 @@
             </a:avLst>
           </a:prstGeom>
           <a:solidFill>
-            <a:srgbClr val="1E7D32"/>
+            <a:srgbClr val="0A6ED1"/>
           </a:solidFill>
           <a:ln/>
         </p:spPr>
@@ -6417,8 +6208,8 @@
         </p:nvSpPr>
         <p:spPr>
           <a:xfrm>
-            <a:off x="5641848" y="2688336"/>
-            <a:ext cx="777240" cy="603504"/>
+            <a:off x="5641848" y="2916936"/>
+            <a:ext cx="777240" cy="658368"/>
           </a:xfrm>
           <a:prstGeom prst="rect">
             <a:avLst/>
@@ -6436,13 +6227,13 @@
             <a:r>
               <a:rPr lang="en-US" sz="1400" b="1" dirty="0">
                 <a:solidFill>
-                  <a:srgbClr val="1E7D32"/>
-                </a:solidFill>
-                <a:latin typeface="Microsoft YaHei" pitchFamily="34" charset="0"/>
-                <a:ea typeface="Microsoft YaHei" pitchFamily="34" charset="-122"/>
-                <a:cs typeface="Microsoft YaHei" pitchFamily="34" charset="-120"/>
-              </a:rPr>
-              <a:t>8.5</a:t>
+                  <a:srgbClr val="0A6ED1"/>
+                </a:solidFill>
+                <a:latin typeface="Microsoft YaHei" pitchFamily="34" charset="0"/>
+                <a:ea typeface="Microsoft YaHei" pitchFamily="34" charset="-122"/>
+                <a:cs typeface="Microsoft YaHei" pitchFamily="34" charset="-120"/>
+              </a:rPr>
+              <a:t>8.0</a:t>
             </a:r>
             <a:endParaRPr lang="en-US" sz="1400" dirty="0"/>
           </a:p>
@@ -6456,8 +6247,8 @@
         </p:nvSpPr>
         <p:spPr>
           <a:xfrm>
-            <a:off x="6583680" y="2688336"/>
-            <a:ext cx="5212080" cy="603504"/>
+            <a:off x="6583680" y="2916936"/>
+            <a:ext cx="5212080" cy="658368"/>
           </a:xfrm>
           <a:prstGeom prst="rect">
             <a:avLst/>
@@ -6484,7 +6275,7 @@
                 <a:ea typeface="Microsoft YaHei" pitchFamily="34" charset="-122"/>
                 <a:cs typeface="Microsoft YaHei" pitchFamily="34" charset="-120"/>
               </a:rPr>
-              <a:t>工程亮点：29 题走真实链路、先测再改；题量还小，未成回归门禁</a:t>
+              <a:t>能读能讲：Z/Y 源码分页读取含 INCLUDE；标准对象读不了，没有跨对象引用分析</a:t>
             </a:r>
             <a:endParaRPr lang="en-US" sz="980" dirty="0"/>
           </a:p>
@@ -6498,8 +6289,8 @@
         </p:nvSpPr>
         <p:spPr>
           <a:xfrm>
-            <a:off x="457200" y="3291840"/>
-            <a:ext cx="1965960" cy="603504"/>
+            <a:off x="457200" y="3575304"/>
+            <a:ext cx="1965960" cy="658368"/>
           </a:xfrm>
           <a:prstGeom prst="rect">
             <a:avLst/>
@@ -6523,7 +6314,7 @@
                 <a:ea typeface="Microsoft YaHei" pitchFamily="34" charset="-122"/>
                 <a:cs typeface="Microsoft YaHei" pitchFamily="34" charset="-120"/>
               </a:rPr>
-              <a:t>代码分析</a:t>
+              <a:t>数据分析</a:t>
             </a:r>
             <a:endParaRPr lang="en-US" sz="1250" dirty="0"/>
           </a:p>
@@ -6537,7 +6328,7 @@
         </p:nvSpPr>
         <p:spPr>
           <a:xfrm>
-            <a:off x="2514600" y="3502152"/>
+            <a:off x="2514600" y="3813048"/>
             <a:ext cx="3017520" cy="182880"/>
           </a:xfrm>
           <a:prstGeom prst="roundRect">
@@ -6559,7 +6350,7 @@
         </p:nvSpPr>
         <p:spPr>
           <a:xfrm>
-            <a:off x="2514600" y="3502152"/>
+            <a:off x="2514600" y="3813048"/>
             <a:ext cx="2414016" cy="182880"/>
           </a:xfrm>
           <a:prstGeom prst="roundRect">
@@ -6581,8 +6372,8 @@
         </p:nvSpPr>
         <p:spPr>
           <a:xfrm>
-            <a:off x="5641848" y="3291840"/>
-            <a:ext cx="777240" cy="603504"/>
+            <a:off x="5641848" y="3575304"/>
+            <a:ext cx="777240" cy="658368"/>
           </a:xfrm>
           <a:prstGeom prst="rect">
             <a:avLst/>
@@ -6620,8 +6411,8 @@
         </p:nvSpPr>
         <p:spPr>
           <a:xfrm>
-            <a:off x="6583680" y="3291840"/>
-            <a:ext cx="5212080" cy="603504"/>
+            <a:off x="6583680" y="3575304"/>
+            <a:ext cx="5212080" cy="658368"/>
           </a:xfrm>
           <a:prstGeom prst="rect">
             <a:avLst/>
@@ -6648,7 +6439,7 @@
                 <a:ea typeface="Microsoft YaHei" pitchFamily="34" charset="-122"/>
                 <a:cs typeface="Microsoft YaHei" pitchFamily="34" charset="-120"/>
               </a:rPr>
-              <a:t>能读能讲：Z/Y 源码分页读取含 INCLUDE；标准对象读不了，没有跨对象引用分析</a:t>
+              <a:t>目录内很稳：查询计划受控、图表自动出；目录外要管理员登记，图表仅柱/线/饼</a:t>
             </a:r>
             <a:endParaRPr lang="en-US" sz="980" dirty="0"/>
           </a:p>
@@ -6662,8 +6453,8 @@
         </p:nvSpPr>
         <p:spPr>
           <a:xfrm>
-            <a:off x="457200" y="3895344"/>
-            <a:ext cx="1965960" cy="603504"/>
+            <a:off x="457200" y="4233672"/>
+            <a:ext cx="1965960" cy="658368"/>
           </a:xfrm>
           <a:prstGeom prst="rect">
             <a:avLst/>
@@ -6687,7 +6478,7 @@
                 <a:ea typeface="Microsoft YaHei" pitchFamily="34" charset="-122"/>
                 <a:cs typeface="Microsoft YaHei" pitchFamily="34" charset="-120"/>
               </a:rPr>
-              <a:t>数据分析</a:t>
+              <a:t>报表执行</a:t>
             </a:r>
             <a:endParaRPr lang="en-US" sz="1250" dirty="0"/>
           </a:p>
@@ -6701,7 +6492,7 @@
         </p:nvSpPr>
         <p:spPr>
           <a:xfrm>
-            <a:off x="2514600" y="4105656"/>
+            <a:off x="2514600" y="4471416"/>
             <a:ext cx="3017520" cy="182880"/>
           </a:xfrm>
           <a:prstGeom prst="roundRect">
@@ -6723,8 +6514,8 @@
         </p:nvSpPr>
         <p:spPr>
           <a:xfrm>
-            <a:off x="2514600" y="4105656"/>
-            <a:ext cx="2414016" cy="182880"/>
+            <a:off x="2514600" y="4471416"/>
+            <a:ext cx="2112264" cy="182880"/>
           </a:xfrm>
           <a:prstGeom prst="roundRect">
             <a:avLst>
@@ -6732,7 +6523,7 @@
             </a:avLst>
           </a:prstGeom>
           <a:solidFill>
-            <a:srgbClr val="0A6ED1"/>
+            <a:srgbClr val="C46A15"/>
           </a:solidFill>
           <a:ln/>
         </p:spPr>
@@ -6745,8 +6536,8 @@
         </p:nvSpPr>
         <p:spPr>
           <a:xfrm>
-            <a:off x="5641848" y="3895344"/>
-            <a:ext cx="777240" cy="603504"/>
+            <a:off x="5641848" y="4233672"/>
+            <a:ext cx="777240" cy="658368"/>
           </a:xfrm>
           <a:prstGeom prst="rect">
             <a:avLst/>
@@ -6764,13 +6555,13 @@
             <a:r>
               <a:rPr lang="en-US" sz="1400" b="1" dirty="0">
                 <a:solidFill>
-                  <a:srgbClr val="0A6ED1"/>
-                </a:solidFill>
-                <a:latin typeface="Microsoft YaHei" pitchFamily="34" charset="0"/>
-                <a:ea typeface="Microsoft YaHei" pitchFamily="34" charset="-122"/>
-                <a:cs typeface="Microsoft YaHei" pitchFamily="34" charset="-120"/>
-              </a:rPr>
-              <a:t>8.0</a:t>
+                  <a:srgbClr val="C46A15"/>
+                </a:solidFill>
+                <a:latin typeface="Microsoft YaHei" pitchFamily="34" charset="0"/>
+                <a:ea typeface="Microsoft YaHei" pitchFamily="34" charset="-122"/>
+                <a:cs typeface="Microsoft YaHei" pitchFamily="34" charset="-120"/>
+              </a:rPr>
+              <a:t>7.0</a:t>
             </a:r>
             <a:endParaRPr lang="en-US" sz="1400" dirty="0"/>
           </a:p>
@@ -6784,8 +6575,8 @@
         </p:nvSpPr>
         <p:spPr>
           <a:xfrm>
-            <a:off x="6583680" y="3895344"/>
-            <a:ext cx="5212080" cy="603504"/>
+            <a:off x="6583680" y="4233672"/>
+            <a:ext cx="5212080" cy="658368"/>
           </a:xfrm>
           <a:prstGeom prst="rect">
             <a:avLst/>
@@ -6812,7 +6603,7 @@
                 <a:ea typeface="Microsoft YaHei" pitchFamily="34" charset="-122"/>
                 <a:cs typeface="Microsoft YaHei" pitchFamily="34" charset="-120"/>
               </a:rPr>
-              <a:t>目录内很稳：查询计划受控、图表自动出；目录外要管理员登记，图表仅柱/线/饼</a:t>
+              <a:t>跑得动、能追问：只支持登记过的 TCode；写参数存在网关兼容问题，异步等待体验一般</a:t>
             </a:r>
             <a:endParaRPr lang="en-US" sz="980" dirty="0"/>
           </a:p>
@@ -6820,177 +6611,13 @@
       </p:sp>
       <p:sp>
         <p:nvSpPr>
-          <p:cNvPr id="32" name="Text 30"/>
-          <p:cNvSpPr/>
-          <p:nvPr/>
-        </p:nvSpPr>
-        <p:spPr>
-          <a:xfrm>
-            <a:off x="457200" y="4498848"/>
-            <a:ext cx="1965960" cy="603504"/>
-          </a:xfrm>
-          <a:prstGeom prst="rect">
-            <a:avLst/>
-          </a:prstGeom>
-          <a:noFill/>
-          <a:ln/>
-        </p:spPr>
-        <p:txBody>
-          <a:bodyPr wrap="square" lIns="0" tIns="0" rIns="0" bIns="0" rtlCol="0" anchor="ctr"/>
-          <a:lstStyle/>
-          <a:p>
-            <a:pPr algn="l" indent="0" marL="0">
-              <a:buNone/>
-            </a:pPr>
-            <a:r>
-              <a:rPr lang="en-US" sz="1250" b="1" dirty="0">
-                <a:solidFill>
-                  <a:srgbClr val="24303C"/>
-                </a:solidFill>
-                <a:latin typeface="Microsoft YaHei" pitchFamily="34" charset="0"/>
-                <a:ea typeface="Microsoft YaHei" pitchFamily="34" charset="-122"/>
-                <a:cs typeface="Microsoft YaHei" pitchFamily="34" charset="-120"/>
-              </a:rPr>
-              <a:t>报表执行</a:t>
-            </a:r>
-            <a:endParaRPr lang="en-US" sz="1250" dirty="0"/>
-          </a:p>
-        </p:txBody>
-      </p:sp>
-      <p:sp>
-        <p:nvSpPr>
-          <p:cNvPr id="33" name="Shape 31"/>
-          <p:cNvSpPr/>
-          <p:nvPr/>
-        </p:nvSpPr>
-        <p:spPr>
-          <a:xfrm>
-            <a:off x="2514600" y="4709160"/>
-            <a:ext cx="3017520" cy="182880"/>
-          </a:xfrm>
-          <a:prstGeom prst="roundRect">
-            <a:avLst>
-              <a:gd name="adj" fmla="val 50000"/>
-            </a:avLst>
-          </a:prstGeom>
-          <a:solidFill>
-            <a:srgbClr val="E7EEF6"/>
-          </a:solidFill>
-          <a:ln/>
-        </p:spPr>
-      </p:sp>
-      <p:sp>
-        <p:nvSpPr>
-          <p:cNvPr id="34" name="Shape 32"/>
-          <p:cNvSpPr/>
-          <p:nvPr/>
-        </p:nvSpPr>
-        <p:spPr>
-          <a:xfrm>
-            <a:off x="2514600" y="4709160"/>
-            <a:ext cx="2112264" cy="182880"/>
-          </a:xfrm>
-          <a:prstGeom prst="roundRect">
-            <a:avLst>
-              <a:gd name="adj" fmla="val 50000"/>
-            </a:avLst>
-          </a:prstGeom>
-          <a:solidFill>
-            <a:srgbClr val="C46A15"/>
-          </a:solidFill>
-          <a:ln/>
-        </p:spPr>
-      </p:sp>
-      <p:sp>
-        <p:nvSpPr>
-          <p:cNvPr id="35" name="Text 33"/>
-          <p:cNvSpPr/>
-          <p:nvPr/>
-        </p:nvSpPr>
-        <p:spPr>
-          <a:xfrm>
-            <a:off x="5641848" y="4498848"/>
-            <a:ext cx="777240" cy="603504"/>
-          </a:xfrm>
-          <a:prstGeom prst="rect">
-            <a:avLst/>
-          </a:prstGeom>
-          <a:noFill/>
-          <a:ln/>
-        </p:spPr>
-        <p:txBody>
-          <a:bodyPr wrap="square" lIns="0" tIns="0" rIns="0" bIns="0" rtlCol="0" anchor="ctr"/>
-          <a:lstStyle/>
-          <a:p>
-            <a:pPr algn="l" indent="0" marL="0">
-              <a:buNone/>
-            </a:pPr>
-            <a:r>
-              <a:rPr lang="en-US" sz="1400" b="1" dirty="0">
-                <a:solidFill>
-                  <a:srgbClr val="C46A15"/>
-                </a:solidFill>
-                <a:latin typeface="Microsoft YaHei" pitchFamily="34" charset="0"/>
-                <a:ea typeface="Microsoft YaHei" pitchFamily="34" charset="-122"/>
-                <a:cs typeface="Microsoft YaHei" pitchFamily="34" charset="-120"/>
-              </a:rPr>
-              <a:t>7.0</a:t>
-            </a:r>
-            <a:endParaRPr lang="en-US" sz="1400" dirty="0"/>
-          </a:p>
-        </p:txBody>
-      </p:sp>
-      <p:sp>
-        <p:nvSpPr>
-          <p:cNvPr id="36" name="Text 34"/>
-          <p:cNvSpPr/>
-          <p:nvPr/>
-        </p:nvSpPr>
-        <p:spPr>
-          <a:xfrm>
-            <a:off x="6583680" y="4498848"/>
-            <a:ext cx="5212080" cy="603504"/>
-          </a:xfrm>
-          <a:prstGeom prst="rect">
-            <a:avLst/>
-          </a:prstGeom>
-          <a:noFill/>
-          <a:ln/>
-        </p:spPr>
-        <p:txBody>
-          <a:bodyPr wrap="square" lIns="0" tIns="0" rIns="0" bIns="0" rtlCol="0" anchor="ctr"/>
-          <a:lstStyle/>
-          <a:p>
-            <a:pPr algn="l" indent="0" marL="0">
-              <a:lnSpc>
-                <a:spcPct val="110000"/>
-              </a:lnSpc>
-              <a:buNone/>
-            </a:pPr>
-            <a:r>
-              <a:rPr lang="en-US" sz="980" dirty="0">
-                <a:solidFill>
-                  <a:srgbClr val="5F7183"/>
-                </a:solidFill>
-                <a:latin typeface="Microsoft YaHei" pitchFamily="34" charset="0"/>
-                <a:ea typeface="Microsoft YaHei" pitchFamily="34" charset="-122"/>
-                <a:cs typeface="Microsoft YaHei" pitchFamily="34" charset="-120"/>
-              </a:rPr>
-              <a:t>跑得动、能追问：只支持登记过的 TCode；写参数存在网关兼容问题，异步等待体验一般</a:t>
-            </a:r>
-            <a:endParaRPr lang="en-US" sz="980" dirty="0"/>
-          </a:p>
-        </p:txBody>
-      </p:sp>
-      <p:sp>
-        <p:nvSpPr>
-          <p:cNvPr id="37" name="Shape 35"/>
-          <p:cNvSpPr/>
-          <p:nvPr/>
-        </p:nvSpPr>
-        <p:spPr>
-          <a:xfrm>
-            <a:off x="457200" y="5285232"/>
+          <p:cNvPr id="32" name="Shape 30"/>
+          <p:cNvSpPr/>
+          <p:nvPr/>
+        </p:nvSpPr>
+        <p:spPr>
+          <a:xfrm>
+            <a:off x="457200" y="5138928"/>
             <a:ext cx="11274552" cy="1170432"/>
           </a:xfrm>
           <a:prstGeom prst="roundRect">
@@ -7011,13 +6638,13 @@
       </p:sp>
       <p:sp>
         <p:nvSpPr>
-          <p:cNvPr id="38" name="Text 36"/>
-          <p:cNvSpPr/>
-          <p:nvPr/>
-        </p:nvSpPr>
-        <p:spPr>
-          <a:xfrm>
-            <a:off x="731520" y="5440680"/>
+          <p:cNvPr id="33" name="Text 31"/>
+          <p:cNvSpPr/>
+          <p:nvPr/>
+        </p:nvSpPr>
+        <p:spPr>
+          <a:xfrm>
+            <a:off x="731520" y="5294376"/>
             <a:ext cx="10698480" cy="868680"/>
           </a:xfrm>
           <a:prstGeom prst="rect">
@@ -7045,7 +6672,7 @@
                 <a:ea typeface="Microsoft YaHei" pitchFamily="34" charset="-122"/>
                 <a:cs typeface="Microsoft YaHei" pitchFamily="34" charset="-120"/>
               </a:rPr>
-              <a:t>总评：综合 8.3 / 10。</a:t>
+              <a:t>总评：综合 8.1 / 10。</a:t>
             </a:r>
             <a:r>
               <a:rPr lang="en-US" sz="1150" dirty="0">

--- a/发布文档/SAP-AI对话助手-项目介绍-V2.0.pptx
+++ b/发布文档/SAP-AI对话助手-项目介绍-V2.0.pptx
@@ -509,7 +509,7 @@
           <a:p>
             <a:r>
               <a:rPr lang="en-US" dirty="0"/>
-              <a:t>开场：四个维度——技术体系、业务场景与评价、不足、用处与方向。四个数字：4 场景、9 只读工具、22 接口、数据零出内网。</a:t>
+              <a:t>开场：四个维度——技术体系、业务场景与评价、不足、用处与方向。四个数字卡现在带明细：4 场景是哪四个、9 工具是什么、2 种模型协议（网关+Ollama，加模型=加一行配置）、数据零出内网。</a:t>
             </a:r>
             <a:endParaRPr lang="en-US" dirty="0"/>
           </a:p>
@@ -861,7 +861,7 @@
           <a:p>
             <a:r>
               <a:rPr lang="en-US" dirty="0"/>
-              <a:t>逐条念分并给理由：分高的是边界窄而可信的场景；分低的共同原因是依赖登记清单与网关兼容。总评 8.1：可信长板、智能深度短板。</a:t>
+              <a:t>逐条念分并给理由：分高的是边界窄而可信的场景；分低的共同原因是依赖登记清单与网关兼容。总评 8.1。特别说明：评分与所用模型强相关，换更强模型代码/数据分析还能涨（加模型=加一行配置）。</a:t>
             </a:r>
             <a:endParaRPr lang="en-US" dirty="0"/>
           </a:p>
@@ -1666,12 +1666,12 @@
         </p:nvSpPr>
         <p:spPr>
           <a:xfrm>
-            <a:off x="685800" y="4343400"/>
-            <a:ext cx="2606040" cy="1234440"/>
+            <a:off x="685800" y="4224528"/>
+            <a:ext cx="2606040" cy="1517904"/>
           </a:xfrm>
           <a:prstGeom prst="roundRect">
             <a:avLst>
-              <a:gd name="adj" fmla="val 5926"/>
+              <a:gd name="adj" fmla="val 4819"/>
             </a:avLst>
           </a:prstGeom>
           <a:solidFill>
@@ -1693,24 +1693,27 @@
         </p:nvSpPr>
         <p:spPr>
           <a:xfrm>
-            <a:off x="868680" y="4480560"/>
-            <a:ext cx="2240280" cy="960120"/>
-          </a:xfrm>
-          <a:prstGeom prst="rect">
-            <a:avLst/>
-          </a:prstGeom>
-          <a:noFill/>
-          <a:ln/>
-        </p:spPr>
-        <p:txBody>
-          <a:bodyPr wrap="square" lIns="0" tIns="0" rIns="0" bIns="0" rtlCol="0" anchor="ctr"/>
-          <a:lstStyle/>
-          <a:p>
-            <a:pPr algn="l" indent="0" marL="0">
-              <a:buNone/>
-            </a:pPr>
-            <a:r>
-              <a:rPr lang="en-US" sz="2600" b="1" dirty="0">
+            <a:off x="868680" y="4352544"/>
+            <a:ext cx="2240280" cy="1280160"/>
+          </a:xfrm>
+          <a:prstGeom prst="rect">
+            <a:avLst/>
+          </a:prstGeom>
+          <a:noFill/>
+          <a:ln/>
+        </p:spPr>
+        <p:txBody>
+          <a:bodyPr wrap="square" lIns="0" tIns="0" rIns="0" bIns="0" rtlCol="0" anchor="t"/>
+          <a:lstStyle/>
+          <a:p>
+            <a:pPr algn="l" indent="0" marL="0">
+              <a:lnSpc>
+                <a:spcPct val="120000"/>
+              </a:lnSpc>
+              <a:buNone/>
+            </a:pPr>
+            <a:r>
+              <a:rPr lang="en-US" sz="2500" b="1" dirty="0">
                 <a:solidFill>
                   <a:srgbClr val="0A6ED1"/>
                 </a:solidFill>
@@ -1718,16 +1721,30 @@
                 <a:ea typeface="Microsoft YaHei" pitchFamily="34" charset="-122"/>
                 <a:cs typeface="Microsoft YaHei" pitchFamily="34" charset="-120"/>
               </a:rPr>
-              <a:t>4 大</a:t>
-            </a:r>
-            <a:endParaRPr lang="en-US" sz="2600" dirty="0"/>
-          </a:p>
-          <a:p>
-            <a:pPr algn="l" indent="0" marL="0">
-              <a:buNone/>
-            </a:pPr>
-            <a:r>
-              <a:rPr lang="en-US" sz="1100" dirty="0">
+              <a:t>4 大  </a:t>
+            </a:r>
+            <a:r>
+              <a:rPr lang="en-US" sz="1250" b="1" dirty="0">
+                <a:solidFill>
+                  <a:srgbClr val="133559"/>
+                </a:solidFill>
+                <a:latin typeface="Microsoft YaHei" pitchFamily="34" charset="0"/>
+                <a:ea typeface="Microsoft YaHei" pitchFamily="34" charset="-122"/>
+                <a:cs typeface="Microsoft YaHei" pitchFamily="34" charset="-120"/>
+              </a:rPr>
+              <a:t>业务场景</a:t>
+            </a:r>
+            <a:endParaRPr lang="en-US" sz="2500" dirty="0"/>
+          </a:p>
+          <a:p>
+            <a:pPr algn="l" indent="0" marL="0">
+              <a:lnSpc>
+                <a:spcPct val="120000"/>
+              </a:lnSpc>
+              <a:buNone/>
+            </a:pPr>
+            <a:r>
+              <a:rPr lang="en-US" sz="950" dirty="0">
                 <a:solidFill>
                   <a:srgbClr val="5F7183"/>
                 </a:solidFill>
@@ -1735,9 +1752,9 @@
                 <a:ea typeface="Microsoft YaHei" pitchFamily="34" charset="-122"/>
                 <a:cs typeface="Microsoft YaHei" pitchFamily="34" charset="-120"/>
               </a:rPr>
-              <a:t>业务场景</a:t>
-            </a:r>
-            <a:endParaRPr lang="en-US" sz="2600" dirty="0"/>
+              <a:t>普通对话 · 代码分析 · 数据分析 · 报表执行</a:t>
+            </a:r>
+            <a:endParaRPr lang="en-US" sz="2500" dirty="0"/>
           </a:p>
         </p:txBody>
       </p:sp>
@@ -1749,12 +1766,12 @@
         </p:nvSpPr>
         <p:spPr>
           <a:xfrm>
-            <a:off x="3493008" y="4343400"/>
-            <a:ext cx="2606040" cy="1234440"/>
+            <a:off x="3493008" y="4224528"/>
+            <a:ext cx="2606040" cy="1517904"/>
           </a:xfrm>
           <a:prstGeom prst="roundRect">
             <a:avLst>
-              <a:gd name="adj" fmla="val 5926"/>
+              <a:gd name="adj" fmla="val 4819"/>
             </a:avLst>
           </a:prstGeom>
           <a:solidFill>
@@ -1776,24 +1793,27 @@
         </p:nvSpPr>
         <p:spPr>
           <a:xfrm>
-            <a:off x="3675888" y="4480560"/>
-            <a:ext cx="2240280" cy="960120"/>
-          </a:xfrm>
-          <a:prstGeom prst="rect">
-            <a:avLst/>
-          </a:prstGeom>
-          <a:noFill/>
-          <a:ln/>
-        </p:spPr>
-        <p:txBody>
-          <a:bodyPr wrap="square" lIns="0" tIns="0" rIns="0" bIns="0" rtlCol="0" anchor="ctr"/>
-          <a:lstStyle/>
-          <a:p>
-            <a:pPr algn="l" indent="0" marL="0">
-              <a:buNone/>
-            </a:pPr>
-            <a:r>
-              <a:rPr lang="en-US" sz="2600" b="1" dirty="0">
+            <a:off x="3675888" y="4352544"/>
+            <a:ext cx="2240280" cy="1280160"/>
+          </a:xfrm>
+          <a:prstGeom prst="rect">
+            <a:avLst/>
+          </a:prstGeom>
+          <a:noFill/>
+          <a:ln/>
+        </p:spPr>
+        <p:txBody>
+          <a:bodyPr wrap="square" lIns="0" tIns="0" rIns="0" bIns="0" rtlCol="0" anchor="t"/>
+          <a:lstStyle/>
+          <a:p>
+            <a:pPr algn="l" indent="0" marL="0">
+              <a:lnSpc>
+                <a:spcPct val="120000"/>
+              </a:lnSpc>
+              <a:buNone/>
+            </a:pPr>
+            <a:r>
+              <a:rPr lang="en-US" sz="2500" b="1" dirty="0">
                 <a:solidFill>
                   <a:srgbClr val="0A6ED1"/>
                 </a:solidFill>
@@ -1801,16 +1821,30 @@
                 <a:ea typeface="Microsoft YaHei" pitchFamily="34" charset="-122"/>
                 <a:cs typeface="Microsoft YaHei" pitchFamily="34" charset="-120"/>
               </a:rPr>
-              <a:t>9 个</a:t>
-            </a:r>
-            <a:endParaRPr lang="en-US" sz="2600" dirty="0"/>
-          </a:p>
-          <a:p>
-            <a:pPr algn="l" indent="0" marL="0">
-              <a:buNone/>
-            </a:pPr>
-            <a:r>
-              <a:rPr lang="en-US" sz="1100" dirty="0">
+              <a:t>9 个  </a:t>
+            </a:r>
+            <a:r>
+              <a:rPr lang="en-US" sz="1250" b="1" dirty="0">
+                <a:solidFill>
+                  <a:srgbClr val="133559"/>
+                </a:solidFill>
+                <a:latin typeface="Microsoft YaHei" pitchFamily="34" charset="0"/>
+                <a:ea typeface="Microsoft YaHei" pitchFamily="34" charset="-122"/>
+                <a:cs typeface="Microsoft YaHei" pitchFamily="34" charset="-120"/>
+              </a:rPr>
+              <a:t>白名单只读工具</a:t>
+            </a:r>
+            <a:endParaRPr lang="en-US" sz="2500" dirty="0"/>
+          </a:p>
+          <a:p>
+            <a:pPr algn="l" indent="0" marL="0">
+              <a:lnSpc>
+                <a:spcPct val="120000"/>
+              </a:lnSpc>
+              <a:buNone/>
+            </a:pPr>
+            <a:r>
+              <a:rPr lang="en-US" sz="950" dirty="0">
                 <a:solidFill>
                   <a:srgbClr val="5F7183"/>
                 </a:solidFill>
@@ -1818,9 +1852,9 @@
                 <a:ea typeface="Microsoft YaHei" pitchFamily="34" charset="-122"/>
                 <a:cs typeface="Microsoft YaHei" pitchFamily="34" charset="-120"/>
               </a:rPr>
-              <a:t>白名单只读工具</a:t>
-            </a:r>
-            <a:endParaRPr lang="en-US" sz="2600" dirty="0"/>
+              <a:t>受控 SQL · 能力目录取数 · 源码与表结构读取</a:t>
+            </a:r>
+            <a:endParaRPr lang="en-US" sz="2500" dirty="0"/>
           </a:p>
         </p:txBody>
       </p:sp>
@@ -1832,12 +1866,12 @@
         </p:nvSpPr>
         <p:spPr>
           <a:xfrm>
-            <a:off x="6300216" y="4343400"/>
-            <a:ext cx="2606040" cy="1234440"/>
+            <a:off x="6300216" y="4224528"/>
+            <a:ext cx="2606040" cy="1517904"/>
           </a:xfrm>
           <a:prstGeom prst="roundRect">
             <a:avLst>
-              <a:gd name="adj" fmla="val 5926"/>
+              <a:gd name="adj" fmla="val 4819"/>
             </a:avLst>
           </a:prstGeom>
           <a:solidFill>
@@ -1859,24 +1893,27 @@
         </p:nvSpPr>
         <p:spPr>
           <a:xfrm>
-            <a:off x="6483096" y="4480560"/>
-            <a:ext cx="2240280" cy="960120"/>
-          </a:xfrm>
-          <a:prstGeom prst="rect">
-            <a:avLst/>
-          </a:prstGeom>
-          <a:noFill/>
-          <a:ln/>
-        </p:spPr>
-        <p:txBody>
-          <a:bodyPr wrap="square" lIns="0" tIns="0" rIns="0" bIns="0" rtlCol="0" anchor="ctr"/>
-          <a:lstStyle/>
-          <a:p>
-            <a:pPr algn="l" indent="0" marL="0">
-              <a:buNone/>
-            </a:pPr>
-            <a:r>
-              <a:rPr lang="en-US" sz="2600" b="1" dirty="0">
+            <a:off x="6483096" y="4352544"/>
+            <a:ext cx="2240280" cy="1280160"/>
+          </a:xfrm>
+          <a:prstGeom prst="rect">
+            <a:avLst/>
+          </a:prstGeom>
+          <a:noFill/>
+          <a:ln/>
+        </p:spPr>
+        <p:txBody>
+          <a:bodyPr wrap="square" lIns="0" tIns="0" rIns="0" bIns="0" rtlCol="0" anchor="t"/>
+          <a:lstStyle/>
+          <a:p>
+            <a:pPr algn="l" indent="0" marL="0">
+              <a:lnSpc>
+                <a:spcPct val="120000"/>
+              </a:lnSpc>
+              <a:buNone/>
+            </a:pPr>
+            <a:r>
+              <a:rPr lang="en-US" sz="2500" b="1" dirty="0">
                 <a:solidFill>
                   <a:srgbClr val="0A6ED1"/>
                 </a:solidFill>
@@ -1884,16 +1921,30 @@
                 <a:ea typeface="Microsoft YaHei" pitchFamily="34" charset="-122"/>
                 <a:cs typeface="Microsoft YaHei" pitchFamily="34" charset="-120"/>
               </a:rPr>
-              <a:t>22 个</a:t>
-            </a:r>
-            <a:endParaRPr lang="en-US" sz="2600" dirty="0"/>
-          </a:p>
-          <a:p>
-            <a:pPr algn="l" indent="0" marL="0">
-              <a:buNone/>
-            </a:pPr>
-            <a:r>
-              <a:rPr lang="en-US" sz="1100" dirty="0">
+              <a:t>2 种  </a:t>
+            </a:r>
+            <a:r>
+              <a:rPr lang="en-US" sz="1250" b="1" dirty="0">
+                <a:solidFill>
+                  <a:srgbClr val="133559"/>
+                </a:solidFill>
+                <a:latin typeface="Microsoft YaHei" pitchFamily="34" charset="0"/>
+                <a:ea typeface="Microsoft YaHei" pitchFamily="34" charset="-122"/>
+                <a:cs typeface="Microsoft YaHei" pitchFamily="34" charset="-120"/>
+              </a:rPr>
+              <a:t>模型接入协议</a:t>
+            </a:r>
+            <a:endParaRPr lang="en-US" sz="2500" dirty="0"/>
+          </a:p>
+          <a:p>
+            <a:pPr algn="l" indent="0" marL="0">
+              <a:lnSpc>
+                <a:spcPct val="120000"/>
+              </a:lnSpc>
+              <a:buNone/>
+            </a:pPr>
+            <a:r>
+              <a:rPr lang="en-US" sz="950" dirty="0">
                 <a:solidFill>
                   <a:srgbClr val="5F7183"/>
                 </a:solidFill>
@@ -1901,9 +1952,9 @@
                 <a:ea typeface="Microsoft YaHei" pitchFamily="34" charset="-122"/>
                 <a:cs typeface="Microsoft YaHei" pitchFamily="34" charset="-120"/>
               </a:rPr>
-              <a:t>OData 接口</a:t>
-            </a:r>
-            <a:endParaRPr lang="en-US" sz="2600" dirty="0"/>
+              <a:t>OpenAI 兼容网关 + 本地 Ollama，加模型=加一行配置</a:t>
+            </a:r>
+            <a:endParaRPr lang="en-US" sz="2500" dirty="0"/>
           </a:p>
         </p:txBody>
       </p:sp>
@@ -1915,12 +1966,12 @@
         </p:nvSpPr>
         <p:spPr>
           <a:xfrm>
-            <a:off x="9107424" y="4343400"/>
-            <a:ext cx="2606040" cy="1234440"/>
+            <a:off x="9107424" y="4224528"/>
+            <a:ext cx="2606040" cy="1517904"/>
           </a:xfrm>
           <a:prstGeom prst="roundRect">
             <a:avLst>
-              <a:gd name="adj" fmla="val 5926"/>
+              <a:gd name="adj" fmla="val 4819"/>
             </a:avLst>
           </a:prstGeom>
           <a:solidFill>
@@ -1942,24 +1993,27 @@
         </p:nvSpPr>
         <p:spPr>
           <a:xfrm>
-            <a:off x="9290304" y="4480560"/>
-            <a:ext cx="2240280" cy="960120"/>
-          </a:xfrm>
-          <a:prstGeom prst="rect">
-            <a:avLst/>
-          </a:prstGeom>
-          <a:noFill/>
-          <a:ln/>
-        </p:spPr>
-        <p:txBody>
-          <a:bodyPr wrap="square" lIns="0" tIns="0" rIns="0" bIns="0" rtlCol="0" anchor="ctr"/>
-          <a:lstStyle/>
-          <a:p>
-            <a:pPr algn="l" indent="0" marL="0">
-              <a:buNone/>
-            </a:pPr>
-            <a:r>
-              <a:rPr lang="en-US" sz="2600" b="1" dirty="0">
+            <a:off x="9290304" y="4352544"/>
+            <a:ext cx="2240280" cy="1280160"/>
+          </a:xfrm>
+          <a:prstGeom prst="rect">
+            <a:avLst/>
+          </a:prstGeom>
+          <a:noFill/>
+          <a:ln/>
+        </p:spPr>
+        <p:txBody>
+          <a:bodyPr wrap="square" lIns="0" tIns="0" rIns="0" bIns="0" rtlCol="0" anchor="t"/>
+          <a:lstStyle/>
+          <a:p>
+            <a:pPr algn="l" indent="0" marL="0">
+              <a:lnSpc>
+                <a:spcPct val="120000"/>
+              </a:lnSpc>
+              <a:buNone/>
+            </a:pPr>
+            <a:r>
+              <a:rPr lang="en-US" sz="2500" b="1" dirty="0">
                 <a:solidFill>
                   <a:srgbClr val="0A6ED1"/>
                 </a:solidFill>
@@ -1967,16 +2021,30 @@
                 <a:ea typeface="Microsoft YaHei" pitchFamily="34" charset="-122"/>
                 <a:cs typeface="Microsoft YaHei" pitchFamily="34" charset="-120"/>
               </a:rPr>
-              <a:t>0 次</a:t>
-            </a:r>
-            <a:endParaRPr lang="en-US" sz="2600" dirty="0"/>
-          </a:p>
-          <a:p>
-            <a:pPr algn="l" indent="0" marL="0">
-              <a:buNone/>
-            </a:pPr>
-            <a:r>
-              <a:rPr lang="en-US" sz="1100" dirty="0">
+              <a:t>0 次  </a:t>
+            </a:r>
+            <a:r>
+              <a:rPr lang="en-US" sz="1250" b="1" dirty="0">
+                <a:solidFill>
+                  <a:srgbClr val="133559"/>
+                </a:solidFill>
+                <a:latin typeface="Microsoft YaHei" pitchFamily="34" charset="0"/>
+                <a:ea typeface="Microsoft YaHei" pitchFamily="34" charset="-122"/>
+                <a:cs typeface="Microsoft YaHei" pitchFamily="34" charset="-120"/>
+              </a:rPr>
+              <a:t>业务数据出内网</a:t>
+            </a:r>
+            <a:endParaRPr lang="en-US" sz="2500" dirty="0"/>
+          </a:p>
+          <a:p>
+            <a:pPr algn="l" indent="0" marL="0">
+              <a:lnSpc>
+                <a:spcPct val="120000"/>
+              </a:lnSpc>
+              <a:buNone/>
+            </a:pPr>
+            <a:r>
+              <a:rPr lang="en-US" sz="950" dirty="0">
                 <a:solidFill>
                   <a:srgbClr val="5F7183"/>
                 </a:solidFill>
@@ -1984,9 +2052,9 @@
                 <a:ea typeface="Microsoft YaHei" pitchFamily="34" charset="-122"/>
                 <a:cs typeface="Microsoft YaHei" pitchFamily="34" charset="-120"/>
               </a:rPr>
-              <a:t>业务数据出内网</a:t>
-            </a:r>
-            <a:endParaRPr lang="en-US" sz="2600" dirty="0"/>
+              <a:t>全程内网 · 业务只读 · 问答与调用全量审计</a:t>
+            </a:r>
+            <a:endParaRPr lang="en-US" sz="2500" dirty="0"/>
           </a:p>
         </p:txBody>
       </p:sp>
@@ -6618,11 +6686,11 @@
         <p:spPr>
           <a:xfrm>
             <a:off x="457200" y="5138928"/>
-            <a:ext cx="11274552" cy="1170432"/>
+            <a:ext cx="11274552" cy="1298448"/>
           </a:xfrm>
           <a:prstGeom prst="roundRect">
             <a:avLst>
-              <a:gd name="adj" fmla="val 7031"/>
+              <a:gd name="adj" fmla="val 6338"/>
             </a:avLst>
           </a:prstGeom>
           <a:solidFill>
@@ -6644,8 +6712,8 @@
         </p:nvSpPr>
         <p:spPr>
           <a:xfrm>
-            <a:off x="731520" y="5294376"/>
-            <a:ext cx="10698480" cy="868680"/>
+            <a:off x="731520" y="5285232"/>
+            <a:ext cx="10698480" cy="1024128"/>
           </a:xfrm>
           <a:prstGeom prst="rect">
             <a:avLst/>
@@ -6683,7 +6751,27 @@
                 <a:ea typeface="Microsoft YaHei" pitchFamily="34" charset="-122"/>
                 <a:cs typeface="Microsoft YaHei" pitchFamily="34" charset="-120"/>
               </a:rPr>
-              <a:t>长板是安全合规与数据可信（内网、只读、全审计）；短板是智能化深度（规则路由、无 RAG、无真流式）。定位：开发与顾问日常高频问题的“第一入口”——八成的日常问题在这解决，两成复杂问题留给专业工具。</a:t>
+              <a:t>长板是安全合规与数据可信（内网、只读、全审计）；短板是智能化深度（规则路由、无 RAG、无真流式）。</a:t>
+            </a:r>
+            <a:endParaRPr lang="en-US" sz="1300" dirty="0"/>
+          </a:p>
+          <a:p>
+            <a:pPr algn="l" indent="0" marL="0">
+              <a:lnSpc>
+                <a:spcPct val="125000"/>
+              </a:lnSpc>
+              <a:buNone/>
+            </a:pPr>
+            <a:r>
+              <a:rPr lang="en-US" sz="1150" dirty="0">
+                <a:solidFill>
+                  <a:srgbClr val="24303C"/>
+                </a:solidFill>
+                <a:latin typeface="Microsoft YaHei" pitchFamily="34" charset="0"/>
+                <a:ea typeface="Microsoft YaHei" pitchFamily="34" charset="-122"/>
+                <a:cs typeface="Microsoft YaHei" pitchFamily="34" charset="-120"/>
+              </a:rPr>
+              <a:t>评分与模型能力强相关：以上基于企业网关默认模型——换更强的模型，代码分析与数据分析仍有上探空间（加模型只需加一行配置，零代码切换）。</a:t>
             </a:r>
             <a:endParaRPr lang="en-US" sz="1300" dirty="0"/>
           </a:p>

--- a/发布文档/SAP-AI对话助手-项目介绍-V2.0.pptx
+++ b/发布文档/SAP-AI对话助手-项目介绍-V2.0.pptx
@@ -509,7 +509,7 @@
           <a:p>
             <a:r>
               <a:rPr lang="en-US" dirty="0"/>
-              <a:t>开场：四个维度——技术体系、业务场景与评价、不足、用处与方向。四个数字卡现在带明细：4 场景是哪四个、9 工具是什么、2 种模型协议（网关+Ollama，加模型=加一行配置）、数据零出内网。</a:t>
+              <a:t>开场：四个维度——技术体系、业务场景与评价、不足、用处与方向。四个数字卡带明细：4 场景是哪四个、9 工具是什么、2 种模型协议（网关+Ollama，加模型=加一行配置）、数据零出内网。</a:t>
             </a:r>
             <a:endParaRPr lang="en-US" dirty="0"/>
           </a:p>
@@ -1037,7 +1037,7 @@
           <a:p>
             <a:r>
               <a:rPr lang="en-US" dirty="0"/>
-              <a:t>左侧五类价值按角色讲；右侧六方向与短板对应：流式→体验、RAG/目录→能力、评测/写操作/联邦→工程与范围。</a:t>
+              <a:t>左侧五类现成价值。右侧是业务深耕路线（依据后续优化计划 O1-O10）：模块扩展（O5 六件套契约）、报表参数自动发现（O2/O3）、任务中心（O6）、结果可复现（O1/O4）、权限审批（O8）、质量可观测（O7）。底部红线：先登记后使用，不做 GUI 自动点击。</a:t>
             </a:r>
             <a:endParaRPr lang="en-US" dirty="0"/>
           </a:p>
@@ -1125,7 +1125,7 @@
           <a:p>
             <a:r>
               <a:rPr lang="en-US" dirty="0"/>
-              <a:t>收尾一句话+三步走：上线→测基线→按方向迭代。</a:t>
+              <a:t>收尾一句话+三步走：上线→测基线→沿业务路线迭代。</a:t>
             </a:r>
             <a:endParaRPr lang="en-US" dirty="0"/>
           </a:p>
@@ -8085,7 +8085,7 @@
                 <a:ea typeface="Microsoft YaHei" pitchFamily="34" charset="-122"/>
                 <a:cs typeface="Microsoft YaHei" pitchFamily="34" charset="-120"/>
               </a:rPr>
-              <a:t>用处与后期方向</a:t>
+              <a:t>用处与后期展望</a:t>
             </a:r>
             <a:endParaRPr lang="en-US" sz="2400" dirty="0"/>
           </a:p>
@@ -8124,7 +8124,7 @@
                 <a:ea typeface="Microsoft YaHei" pitchFamily="34" charset="-122"/>
                 <a:cs typeface="Microsoft YaHei" pitchFamily="34" charset="-120"/>
               </a:rPr>
-              <a:t>左：现在就能兑现的价值；右：下一步值得投入的研究点，与上一页短板一一对应</a:t>
+              <a:t>左：现在就能兑现的价值；右：最终目标是深度连接 SAP 做业务——路线依据《Agent 多业务任务与报表分析·后续优化计划》</a:t>
             </a:r>
             <a:endParaRPr lang="en-US" sz="1150" dirty="0"/>
           </a:p>
@@ -8178,7 +8178,7 @@
         <p:spPr>
           <a:xfrm>
             <a:off x="457200" y="1371600"/>
-            <a:ext cx="5486400" cy="4846320"/>
+            <a:ext cx="5120640" cy="4846320"/>
           </a:xfrm>
           <a:prstGeom prst="roundRect">
             <a:avLst>
@@ -8205,7 +8205,7 @@
         <p:spPr>
           <a:xfrm>
             <a:off x="713232" y="1554480"/>
-            <a:ext cx="4937760" cy="411480"/>
+            <a:ext cx="4572000" cy="411480"/>
           </a:xfrm>
           <a:prstGeom prst="rect">
             <a:avLst/>
@@ -8243,7 +8243,7 @@
         </p:nvSpPr>
         <p:spPr>
           <a:xfrm>
-            <a:off x="731520" y="2130552"/>
+            <a:off x="731520" y="2167128"/>
             <a:ext cx="91440" cy="91440"/>
           </a:xfrm>
           <a:prstGeom prst="ellipse">
@@ -8263,8 +8263,8 @@
         </p:nvSpPr>
         <p:spPr>
           <a:xfrm>
-            <a:off x="932688" y="2011680"/>
-            <a:ext cx="4800600" cy="777240"/>
+            <a:off x="932688" y="2048256"/>
+            <a:ext cx="4434840" cy="777240"/>
           </a:xfrm>
           <a:prstGeom prst="rect">
             <a:avLst/>
@@ -8302,7 +8302,7 @@
                 <a:ea typeface="Microsoft YaHei" pitchFamily="34" charset="-122"/>
                 <a:cs typeface="Microsoft YaHei" pitchFamily="34" charset="-120"/>
               </a:rPr>
-              <a:t>读源码、查表结构、取样例数据，少开 SE80/SE16；代码模板随手要随手改</a:t>
+              <a:t>读源码、查表结构、取样例数据，少开 SE80/SE16</a:t>
             </a:r>
             <a:endParaRPr lang="en-US" sz="1200" dirty="0"/>
           </a:p>
@@ -8316,7 +8316,7 @@
         </p:nvSpPr>
         <p:spPr>
           <a:xfrm>
-            <a:off x="731520" y="2935224"/>
+            <a:off x="731520" y="2971800"/>
             <a:ext cx="91440" cy="91440"/>
           </a:xfrm>
           <a:prstGeom prst="ellipse">
@@ -8336,8 +8336,8 @@
         </p:nvSpPr>
         <p:spPr>
           <a:xfrm>
-            <a:off x="932688" y="2816352"/>
-            <a:ext cx="4800600" cy="777240"/>
+            <a:off x="932688" y="2852928"/>
+            <a:ext cx="4434840" cy="777240"/>
           </a:xfrm>
           <a:prstGeom prst="rect">
             <a:avLst/>
@@ -8389,7 +8389,7 @@
         </p:nvSpPr>
         <p:spPr>
           <a:xfrm>
-            <a:off x="731520" y="3739896"/>
+            <a:off x="731520" y="3776472"/>
             <a:ext cx="91440" cy="91440"/>
           </a:xfrm>
           <a:prstGeom prst="ellipse">
@@ -8409,8 +8409,8 @@
         </p:nvSpPr>
         <p:spPr>
           <a:xfrm>
-            <a:off x="932688" y="3621024"/>
-            <a:ext cx="4800600" cy="777240"/>
+            <a:off x="932688" y="3657600"/>
+            <a:ext cx="4434840" cy="777240"/>
           </a:xfrm>
           <a:prstGeom prst="rect">
             <a:avLst/>
@@ -8462,7 +8462,7 @@
         </p:nvSpPr>
         <p:spPr>
           <a:xfrm>
-            <a:off x="731520" y="4544568"/>
+            <a:off x="731520" y="4581144"/>
             <a:ext cx="91440" cy="91440"/>
           </a:xfrm>
           <a:prstGeom prst="ellipse">
@@ -8482,8 +8482,8 @@
         </p:nvSpPr>
         <p:spPr>
           <a:xfrm>
-            <a:off x="932688" y="4425696"/>
-            <a:ext cx="4800600" cy="777240"/>
+            <a:off x="932688" y="4462272"/>
+            <a:ext cx="4434840" cy="777240"/>
           </a:xfrm>
           <a:prstGeom prst="rect">
             <a:avLst/>
@@ -8535,7 +8535,7 @@
         </p:nvSpPr>
         <p:spPr>
           <a:xfrm>
-            <a:off x="731520" y="5349240"/>
+            <a:off x="731520" y="5385816"/>
             <a:ext cx="91440" cy="91440"/>
           </a:xfrm>
           <a:prstGeom prst="ellipse">
@@ -8555,8 +8555,8 @@
         </p:nvSpPr>
         <p:spPr>
           <a:xfrm>
-            <a:off x="932688" y="5230368"/>
-            <a:ext cx="4800600" cy="777240"/>
+            <a:off x="932688" y="5266944"/>
+            <a:ext cx="4434840" cy="777240"/>
           </a:xfrm>
           <a:prstGeom prst="rect">
             <a:avLst/>
@@ -8594,7 +8594,7 @@
                 <a:ea typeface="Microsoft YaHei" pitchFamily="34" charset="-122"/>
                 <a:cs typeface="Microsoft YaHei" pitchFamily="34" charset="-120"/>
               </a:rPr>
-              <a:t>全内网、可审计、数据只读，是集团推 AI 阻力最小的切口</a:t>
+              <a:t>全内网、可审计、数据只读，集团推 AI 阻力最小的切口</a:t>
             </a:r>
             <a:endParaRPr lang="en-US" sz="1200" dirty="0"/>
           </a:p>
@@ -8608,8 +8608,8 @@
         </p:nvSpPr>
         <p:spPr>
           <a:xfrm>
-            <a:off x="6245352" y="1371600"/>
-            <a:ext cx="5489143" cy="4846320"/>
+            <a:off x="5852160" y="1371600"/>
+            <a:ext cx="5882335" cy="4846320"/>
           </a:xfrm>
           <a:prstGeom prst="roundRect">
             <a:avLst>
@@ -8630,8 +8630,8 @@
         </p:nvSpPr>
         <p:spPr>
           <a:xfrm>
-            <a:off x="6501384" y="1554480"/>
-            <a:ext cx="4977079" cy="411480"/>
+            <a:off x="6108192" y="1517904"/>
+            <a:ext cx="5370271" cy="384048"/>
           </a:xfrm>
           <a:prstGeom prst="rect">
             <a:avLst/>
@@ -8655,7 +8655,7 @@
                 <a:ea typeface="Microsoft YaHei" pitchFamily="34" charset="-122"/>
                 <a:cs typeface="Microsoft YaHei" pitchFamily="34" charset="-120"/>
               </a:rPr>
-              <a:t>后期研究方向</a:t>
+              <a:t>后期展望 · 深耕 SAP 业务</a:t>
             </a:r>
             <a:endParaRPr lang="en-US" sz="1550" dirty="0"/>
           </a:p>
@@ -8669,8 +8669,8 @@
         </p:nvSpPr>
         <p:spPr>
           <a:xfrm>
-            <a:off x="6501384" y="2084832"/>
-            <a:ext cx="4977079" cy="658368"/>
+            <a:off x="6108192" y="1901952"/>
+            <a:ext cx="5370271" cy="310896"/>
           </a:xfrm>
           <a:prstGeom prst="rect">
             <a:avLst/>
@@ -8683,13 +8683,72 @@
           <a:lstStyle/>
           <a:p>
             <a:pPr algn="l" indent="0" marL="0">
+              <a:buNone/>
+            </a:pPr>
+            <a:r>
+              <a:rPr lang="en-US" sz="950" i="1" dirty="0">
+                <a:solidFill>
+                  <a:srgbClr val="9FB6D4"/>
+                </a:solidFill>
+                <a:latin typeface="Microsoft YaHei" pitchFamily="34" charset="0"/>
+                <a:ea typeface="Microsoft YaHei" pitchFamily="34" charset="-122"/>
+                <a:cs typeface="Microsoft YaHei" pitchFamily="34" charset="-120"/>
+              </a:rPr>
+              <a:t>从“能查 SAP”走到“会做 SAP 业务”：沿既有任务框架逐模块扩展，先登记后使用、先只读后受控写</a:t>
+            </a:r>
+            <a:endParaRPr lang="en-US" sz="950" dirty="0"/>
+          </a:p>
+        </p:txBody>
+      </p:sp>
+      <p:sp>
+        <p:nvSpPr>
+          <p:cNvPr id="22" name="Shape 20"/>
+          <p:cNvSpPr/>
+          <p:nvPr/>
+        </p:nvSpPr>
+        <p:spPr>
+          <a:xfrm>
+            <a:off x="6126480" y="2354580"/>
+            <a:ext cx="82296" cy="82296"/>
+          </a:xfrm>
+          <a:prstGeom prst="ellipse">
+            <a:avLst/>
+          </a:prstGeom>
+          <a:solidFill>
+            <a:srgbClr val="F0AB00"/>
+          </a:solidFill>
+          <a:ln/>
+        </p:spPr>
+      </p:sp>
+      <p:sp>
+        <p:nvSpPr>
+          <p:cNvPr id="23" name="Text 21"/>
+          <p:cNvSpPr/>
+          <p:nvPr/>
+        </p:nvSpPr>
+        <p:spPr>
+          <a:xfrm>
+            <a:off x="6309360" y="2267712"/>
+            <a:ext cx="5150815" cy="566928"/>
+          </a:xfrm>
+          <a:prstGeom prst="rect">
+            <a:avLst/>
+          </a:prstGeom>
+          <a:noFill/>
+          <a:ln/>
+        </p:spPr>
+        <p:txBody>
+          <a:bodyPr wrap="square" lIns="0" tIns="0" rIns="0" bIns="0" rtlCol="0" anchor="t"/>
+          <a:lstStyle/>
+          <a:p>
+            <a:pPr algn="l" indent="0" marL="0">
               <a:lnSpc>
-                <a:spcPct val="118000"/>
+                <a:spcPct val="112000"/>
               </a:lnSpc>
               <a:buNone/>
             </a:pPr>
             <a:r>
-              <a:rPr lang="en-US" sz="1200" b="1" dirty="0">
+              <a:rPr lang="en-US" sz="1150" b="1" dirty="0">
                 <a:solidFill>
                   <a:srgbClr val="F0AB00"/>
                 </a:solidFill>
@@ -8697,10 +8756,19 @@
                 <a:ea typeface="Microsoft YaHei" pitchFamily="34" charset="-122"/>
                 <a:cs typeface="Microsoft YaHei" pitchFamily="34" charset="-120"/>
               </a:rPr>
-              <a:t>流式输出：</a:t>
-            </a:r>
-            <a:r>
-              <a:rPr lang="en-US" sz="1000" dirty="0">
+              <a:t>更多业务模块接入  O5</a:t>
+            </a:r>
+            <a:endParaRPr lang="en-US" sz="1150" dirty="0"/>
+          </a:p>
+          <a:p>
+            <a:pPr algn="l" indent="0" marL="0">
+              <a:lnSpc>
+                <a:spcPct val="112000"/>
+              </a:lnSpc>
+              <a:buNone/>
+            </a:pPr>
+            <a:r>
+              <a:rPr lang="en-US" sz="930" dirty="0">
                 <a:solidFill>
                   <a:srgbClr val="C8D6E8"/>
                 </a:solidFill>
@@ -8708,22 +8776,42 @@
                 <a:ea typeface="Microsoft YaHei" pitchFamily="34" charset="-122"/>
                 <a:cs typeface="Microsoft YaHei" pitchFamily="34" charset="-120"/>
               </a:rPr>
-              <a:t>SSE 打通 SAP 网关，长答案边生成边显示（对应：无真流式）</a:t>
-            </a:r>
-            <a:endParaRPr lang="en-US" sz="1200" dirty="0"/>
-          </a:p>
-        </p:txBody>
-      </p:sp>
-      <p:sp>
-        <p:nvSpPr>
-          <p:cNvPr id="22" name="Text 20"/>
-          <p:cNvSpPr/>
-          <p:nvPr/>
-        </p:nvSpPr>
-        <p:spPr>
-          <a:xfrm>
-            <a:off x="6501384" y="2770632"/>
-            <a:ext cx="4977079" cy="658368"/>
+              <a:t>库存、采购、销售、财务按统一契约逐个接入：意图、任务、参数、工具、权限、验收六件套</a:t>
+            </a:r>
+            <a:endParaRPr lang="en-US" sz="1150" dirty="0"/>
+          </a:p>
+        </p:txBody>
+      </p:sp>
+      <p:sp>
+        <p:nvSpPr>
+          <p:cNvPr id="24" name="Shape 22"/>
+          <p:cNvSpPr/>
+          <p:nvPr/>
+        </p:nvSpPr>
+        <p:spPr>
+          <a:xfrm>
+            <a:off x="6126480" y="2930652"/>
+            <a:ext cx="82296" cy="82296"/>
+          </a:xfrm>
+          <a:prstGeom prst="ellipse">
+            <a:avLst/>
+          </a:prstGeom>
+          <a:solidFill>
+            <a:srgbClr val="F0AB00"/>
+          </a:solidFill>
+          <a:ln/>
+        </p:spPr>
+      </p:sp>
+      <p:sp>
+        <p:nvSpPr>
+          <p:cNvPr id="25" name="Text 23"/>
+          <p:cNvSpPr/>
+          <p:nvPr/>
+        </p:nvSpPr>
+        <p:spPr>
+          <a:xfrm>
+            <a:off x="6309360" y="2843784"/>
+            <a:ext cx="5150815" cy="566928"/>
           </a:xfrm>
           <a:prstGeom prst="rect">
             <a:avLst/>
@@ -8737,12 +8825,12 @@
           <a:p>
             <a:pPr algn="l" indent="0" marL="0">
               <a:lnSpc>
-                <a:spcPct val="118000"/>
+                <a:spcPct val="112000"/>
               </a:lnSpc>
               <a:buNone/>
             </a:pPr>
             <a:r>
-              <a:rPr lang="en-US" sz="1200" b="1" dirty="0">
+              <a:rPr lang="en-US" sz="1150" b="1" dirty="0">
                 <a:solidFill>
                   <a:srgbClr val="F0AB00"/>
                 </a:solidFill>
@@ -8750,10 +8838,19 @@
                 <a:ea typeface="Microsoft YaHei" pitchFamily="34" charset="-122"/>
                 <a:cs typeface="Microsoft YaHei" pitchFamily="34" charset="-120"/>
               </a:rPr>
-              <a:t>知识库 + RAG 混合：</a:t>
-            </a:r>
-            <a:r>
-              <a:rPr lang="en-US" sz="1000" dirty="0">
+              <a:t>报表生态深化  O2/O3</a:t>
+            </a:r>
+            <a:endParaRPr lang="en-US" sz="1150" dirty="0"/>
+          </a:p>
+          <a:p>
+            <a:pPr algn="l" indent="0" marL="0">
+              <a:lnSpc>
+                <a:spcPct val="112000"/>
+              </a:lnSpc>
+              <a:buNone/>
+            </a:pPr>
+            <a:r>
+              <a:rPr lang="en-US" sz="930" dirty="0">
                 <a:solidFill>
                   <a:srgbClr val="C8D6E8"/>
                 </a:solidFill>
@@ -8761,22 +8858,42 @@
                 <a:ea typeface="Microsoft YaHei" pitchFamily="34" charset="-122"/>
                 <a:cs typeface="Microsoft YaHei" pitchFamily="34" charset="-120"/>
               </a:rPr>
-              <a:t>文档知识检索与实时取数互补，沉淀操作手册与历史结论</a:t>
-            </a:r>
-            <a:endParaRPr lang="en-US" sz="1200" dirty="0"/>
-          </a:p>
-        </p:txBody>
-      </p:sp>
-      <p:sp>
-        <p:nvSpPr>
-          <p:cNvPr id="23" name="Text 21"/>
-          <p:cNvSpPr/>
-          <p:nvPr/>
-        </p:nvSpPr>
-        <p:spPr>
-          <a:xfrm>
-            <a:off x="6501384" y="3456432"/>
-            <a:ext cx="4977079" cy="658368"/>
+              <a:t>参数自动发现（选择屏元数据→人工审核后发布）；变式/版本/默认值分开管理</a:t>
+            </a:r>
+            <a:endParaRPr lang="en-US" sz="1150" dirty="0"/>
+          </a:p>
+        </p:txBody>
+      </p:sp>
+      <p:sp>
+        <p:nvSpPr>
+          <p:cNvPr id="26" name="Shape 24"/>
+          <p:cNvSpPr/>
+          <p:nvPr/>
+        </p:nvSpPr>
+        <p:spPr>
+          <a:xfrm>
+            <a:off x="6126480" y="3506724"/>
+            <a:ext cx="82296" cy="82296"/>
+          </a:xfrm>
+          <a:prstGeom prst="ellipse">
+            <a:avLst/>
+          </a:prstGeom>
+          <a:solidFill>
+            <a:srgbClr val="F0AB00"/>
+          </a:solidFill>
+          <a:ln/>
+        </p:spPr>
+      </p:sp>
+      <p:sp>
+        <p:nvSpPr>
+          <p:cNvPr id="27" name="Text 25"/>
+          <p:cNvSpPr/>
+          <p:nvPr/>
+        </p:nvSpPr>
+        <p:spPr>
+          <a:xfrm>
+            <a:off x="6309360" y="3419856"/>
+            <a:ext cx="5150815" cy="566928"/>
           </a:xfrm>
           <a:prstGeom prst="rect">
             <a:avLst/>
@@ -8790,12 +8907,12 @@
           <a:p>
             <a:pPr algn="l" indent="0" marL="0">
               <a:lnSpc>
-                <a:spcPct val="118000"/>
+                <a:spcPct val="112000"/>
               </a:lnSpc>
               <a:buNone/>
             </a:pPr>
             <a:r>
-              <a:rPr lang="en-US" sz="1200" b="1" dirty="0">
+              <a:rPr lang="en-US" sz="1150" b="1" dirty="0">
                 <a:solidFill>
                   <a:srgbClr val="F0AB00"/>
                 </a:solidFill>
@@ -8803,10 +8920,19 @@
                 <a:ea typeface="Microsoft YaHei" pitchFamily="34" charset="-122"/>
                 <a:cs typeface="Microsoft YaHei" pitchFamily="34" charset="-120"/>
               </a:rPr>
-              <a:t>能力目录自助登记：</a:t>
-            </a:r>
-            <a:r>
-              <a:rPr lang="en-US" sz="1000" dirty="0">
+              <a:t>任务中心与异步  O6</a:t>
+            </a:r>
+            <a:endParaRPr lang="en-US" sz="1150" dirty="0"/>
+          </a:p>
+          <a:p>
+            <a:pPr algn="l" indent="0" marL="0">
+              <a:lnSpc>
+                <a:spcPct val="112000"/>
+              </a:lnSpc>
+              <a:buNone/>
+            </a:pPr>
+            <a:r>
+              <a:rPr lang="en-US" sz="930" dirty="0">
                 <a:solidFill>
                   <a:srgbClr val="C8D6E8"/>
                 </a:solidFill>
@@ -8814,22 +8940,42 @@
                 <a:ea typeface="Microsoft YaHei" pitchFamily="34" charset="-122"/>
                 <a:cs typeface="Microsoft YaHei" pitchFamily="34" charset="-120"/>
               </a:rPr>
-              <a:t>管理员一句话“把 ZIDPMM455 加进来”自动完成登记</a:t>
-            </a:r>
-            <a:endParaRPr lang="en-US" sz="1200" dirty="0"/>
-          </a:p>
-        </p:txBody>
-      </p:sp>
-      <p:sp>
-        <p:nvSpPr>
-          <p:cNvPr id="24" name="Text 22"/>
-          <p:cNvSpPr/>
-          <p:nvPr/>
-        </p:nvSpPr>
-        <p:spPr>
-          <a:xfrm>
-            <a:off x="6501384" y="4142232"/>
-            <a:ext cx="4977079" cy="658368"/>
+              <a:t>任务列表看运行中/失败/待填参数，支持取消重试、定时执行与消息通知</a:t>
+            </a:r>
+            <a:endParaRPr lang="en-US" sz="1150" dirty="0"/>
+          </a:p>
+        </p:txBody>
+      </p:sp>
+      <p:sp>
+        <p:nvSpPr>
+          <p:cNvPr id="28" name="Shape 26"/>
+          <p:cNvSpPr/>
+          <p:nvPr/>
+        </p:nvSpPr>
+        <p:spPr>
+          <a:xfrm>
+            <a:off x="6126480" y="4082796"/>
+            <a:ext cx="82296" cy="82296"/>
+          </a:xfrm>
+          <a:prstGeom prst="ellipse">
+            <a:avLst/>
+          </a:prstGeom>
+          <a:solidFill>
+            <a:srgbClr val="F0AB00"/>
+          </a:solidFill>
+          <a:ln/>
+        </p:spPr>
+      </p:sp>
+      <p:sp>
+        <p:nvSpPr>
+          <p:cNvPr id="29" name="Text 27"/>
+          <p:cNvSpPr/>
+          <p:nvPr/>
+        </p:nvSpPr>
+        <p:spPr>
+          <a:xfrm>
+            <a:off x="6309360" y="3995928"/>
+            <a:ext cx="5150815" cy="566928"/>
           </a:xfrm>
           <a:prstGeom prst="rect">
             <a:avLst/>
@@ -8843,12 +8989,12 @@
           <a:p>
             <a:pPr algn="l" indent="0" marL="0">
               <a:lnSpc>
-                <a:spcPct val="118000"/>
+                <a:spcPct val="112000"/>
               </a:lnSpc>
               <a:buNone/>
             </a:pPr>
             <a:r>
-              <a:rPr lang="en-US" sz="1200" b="1" dirty="0">
+              <a:rPr lang="en-US" sz="1150" b="1" dirty="0">
                 <a:solidFill>
                   <a:srgbClr val="F0AB00"/>
                 </a:solidFill>
@@ -8856,10 +9002,19 @@
                 <a:ea typeface="Microsoft YaHei" pitchFamily="34" charset="-122"/>
                 <a:cs typeface="Microsoft YaHei" pitchFamily="34" charset="-120"/>
               </a:rPr>
-              <a:t>评测扩容 + 回归门禁：</a:t>
-            </a:r>
-            <a:r>
-              <a:rPr lang="en-US" sz="1000" dirty="0">
+              <a:t>结果可复现  O1/O4</a:t>
+            </a:r>
+            <a:endParaRPr lang="en-US" sz="1150" dirty="0"/>
+          </a:p>
+          <a:p>
+            <a:pPr algn="l" indent="0" marL="0">
+              <a:lnSpc>
+                <a:spcPct val="112000"/>
+              </a:lnSpc>
+              <a:buNone/>
+            </a:pPr>
+            <a:r>
+              <a:rPr lang="en-US" sz="930" dirty="0">
                 <a:solidFill>
                   <a:srgbClr val="C8D6E8"/>
                 </a:solidFill>
@@ -8867,22 +9022,42 @@
                 <a:ea typeface="Microsoft YaHei" pitchFamily="34" charset="-122"/>
                 <a:cs typeface="Microsoft YaHei" pitchFamily="34" charset="-120"/>
               </a:rPr>
-              <a:t>题库扩到 100+，每次发版自动跑、不过不放行</a:t>
-            </a:r>
-            <a:endParaRPr lang="en-US" sz="1200" dirty="0"/>
-          </a:p>
-        </p:txBody>
-      </p:sp>
-      <p:sp>
-        <p:nvSpPr>
-          <p:cNvPr id="25" name="Text 23"/>
-          <p:cNvSpPr/>
-          <p:nvPr/>
-        </p:nvSpPr>
-        <p:spPr>
-          <a:xfrm>
-            <a:off x="6501384" y="4828032"/>
-            <a:ext cx="4977079" cy="658368"/>
+              <a:t>结果按编号引用不整表塞模型；记录数据时间点，历史结论不会建立在错的版本上</a:t>
+            </a:r>
+            <a:endParaRPr lang="en-US" sz="1150" dirty="0"/>
+          </a:p>
+        </p:txBody>
+      </p:sp>
+      <p:sp>
+        <p:nvSpPr>
+          <p:cNvPr id="30" name="Shape 28"/>
+          <p:cNvSpPr/>
+          <p:nvPr/>
+        </p:nvSpPr>
+        <p:spPr>
+          <a:xfrm>
+            <a:off x="6126480" y="4658868"/>
+            <a:ext cx="82296" cy="82296"/>
+          </a:xfrm>
+          <a:prstGeom prst="ellipse">
+            <a:avLst/>
+          </a:prstGeom>
+          <a:solidFill>
+            <a:srgbClr val="F0AB00"/>
+          </a:solidFill>
+          <a:ln/>
+        </p:spPr>
+      </p:sp>
+      <p:sp>
+        <p:nvSpPr>
+          <p:cNvPr id="31" name="Text 29"/>
+          <p:cNvSpPr/>
+          <p:nvPr/>
+        </p:nvSpPr>
+        <p:spPr>
+          <a:xfrm>
+            <a:off x="6309360" y="4572000"/>
+            <a:ext cx="5150815" cy="566928"/>
           </a:xfrm>
           <a:prstGeom prst="rect">
             <a:avLst/>
@@ -8896,12 +9071,12 @@
           <a:p>
             <a:pPr algn="l" indent="0" marL="0">
               <a:lnSpc>
-                <a:spcPct val="118000"/>
+                <a:spcPct val="112000"/>
               </a:lnSpc>
               <a:buNone/>
             </a:pPr>
             <a:r>
-              <a:rPr lang="en-US" sz="1200" b="1" dirty="0">
+              <a:rPr lang="en-US" sz="1150" b="1" dirty="0">
                 <a:solidFill>
                   <a:srgbClr val="F0AB00"/>
                 </a:solidFill>
@@ -8909,10 +9084,19 @@
                 <a:ea typeface="Microsoft YaHei" pitchFamily="34" charset="-122"/>
                 <a:cs typeface="Microsoft YaHei" pitchFamily="34" charset="-120"/>
               </a:rPr>
-              <a:t>受控写操作：</a:t>
-            </a:r>
-            <a:r>
-              <a:rPr lang="en-US" sz="1000" dirty="0">
+              <a:t>细粒度权限与审批  O8</a:t>
+            </a:r>
+            <a:endParaRPr lang="en-US" sz="1150" dirty="0"/>
+          </a:p>
+          <a:p>
+            <a:pPr algn="l" indent="0" marL="0">
+              <a:lnSpc>
+                <a:spcPct val="112000"/>
+              </a:lnSpc>
+              <a:buNone/>
+            </a:pPr>
+            <a:r>
+              <a:rPr lang="en-US" sz="930" dirty="0">
                 <a:solidFill>
                   <a:srgbClr val="C8D6E8"/>
                 </a:solidFill>
@@ -8920,22 +9104,42 @@
                 <a:ea typeface="Microsoft YaHei" pitchFamily="34" charset="-122"/>
                 <a:cs typeface="Microsoft YaHei" pitchFamily="34" charset="-120"/>
               </a:rPr>
-              <a:t>参数确认+沙箱模拟+审批流，从只读走向受控写入</a:t>
-            </a:r>
-            <a:endParaRPr lang="en-US" sz="1200" dirty="0"/>
-          </a:p>
-        </p:txBody>
-      </p:sp>
-      <p:sp>
-        <p:nvSpPr>
-          <p:cNvPr id="26" name="Text 24"/>
-          <p:cNvSpPr/>
-          <p:nvPr/>
-        </p:nvSpPr>
-        <p:spPr>
-          <a:xfrm>
-            <a:off x="6501384" y="5513832"/>
-            <a:ext cx="4977079" cy="658368"/>
+              <a:t>查看/提交/读取/导出分开授权；高风险报表走审批状态，审批与运行绑定留痕</a:t>
+            </a:r>
+            <a:endParaRPr lang="en-US" sz="1150" dirty="0"/>
+          </a:p>
+        </p:txBody>
+      </p:sp>
+      <p:sp>
+        <p:nvSpPr>
+          <p:cNvPr id="32" name="Shape 30"/>
+          <p:cNvSpPr/>
+          <p:nvPr/>
+        </p:nvSpPr>
+        <p:spPr>
+          <a:xfrm>
+            <a:off x="6126480" y="5234940"/>
+            <a:ext cx="82296" cy="82296"/>
+          </a:xfrm>
+          <a:prstGeom prst="ellipse">
+            <a:avLst/>
+          </a:prstGeom>
+          <a:solidFill>
+            <a:srgbClr val="F0AB00"/>
+          </a:solidFill>
+          <a:ln/>
+        </p:spPr>
+      </p:sp>
+      <p:sp>
+        <p:nvSpPr>
+          <p:cNvPr id="33" name="Text 31"/>
+          <p:cNvSpPr/>
+          <p:nvPr/>
+        </p:nvSpPr>
+        <p:spPr>
+          <a:xfrm>
+            <a:off x="6309360" y="5148072"/>
+            <a:ext cx="5150815" cy="566928"/>
           </a:xfrm>
           <a:prstGeom prst="rect">
             <a:avLst/>
@@ -8949,12 +9153,12 @@
           <a:p>
             <a:pPr algn="l" indent="0" marL="0">
               <a:lnSpc>
-                <a:spcPct val="118000"/>
+                <a:spcPct val="112000"/>
               </a:lnSpc>
               <a:buNone/>
             </a:pPr>
             <a:r>
-              <a:rPr lang="en-US" sz="1200" b="1" dirty="0">
+              <a:rPr lang="en-US" sz="1150" b="1" dirty="0">
                 <a:solidFill>
                   <a:srgbClr val="F0AB00"/>
                 </a:solidFill>
@@ -8962,10 +9166,19 @@
                 <a:ea typeface="Microsoft YaHei" pitchFamily="34" charset="-122"/>
                 <a:cs typeface="Microsoft YaHei" pitchFamily="34" charset="-120"/>
               </a:rPr>
-              <a:t>多系统联邦：</a:t>
-            </a:r>
-            <a:r>
-              <a:rPr lang="en-US" sz="1000" dirty="0">
+              <a:t>质量与可观测  O7</a:t>
+            </a:r>
+            <a:endParaRPr lang="en-US" sz="1150" dirty="0"/>
+          </a:p>
+          <a:p>
+            <a:pPr algn="l" indent="0" marL="0">
+              <a:lnSpc>
+                <a:spcPct val="112000"/>
+              </a:lnSpc>
+              <a:buNone/>
+            </a:pPr>
+            <a:r>
+              <a:rPr lang="en-US" sz="930" dirty="0">
                 <a:solidFill>
                   <a:srgbClr val="C8D6E8"/>
                 </a:solidFill>
@@ -8973,9 +9186,48 @@
                 <a:ea typeface="Microsoft YaHei" pitchFamily="34" charset="-122"/>
                 <a:cs typeface="Microsoft YaHei" pitchFamily="34" charset="-120"/>
               </a:rPr>
-              <a:t>一个入口查多套 SAP/多 client，统一权限映射</a:t>
-            </a:r>
-            <a:endParaRPr lang="en-US" sz="1200" dirty="0"/>
+              <a:t>路由准确率、P95 耗时、人工接管率纳入评估，随新模块灰度同步建设</a:t>
+            </a:r>
+            <a:endParaRPr lang="en-US" sz="1150" dirty="0"/>
+          </a:p>
+        </p:txBody>
+      </p:sp>
+      <p:sp>
+        <p:nvSpPr>
+          <p:cNvPr id="34" name="Text 32"/>
+          <p:cNvSpPr/>
+          <p:nvPr/>
+        </p:nvSpPr>
+        <p:spPr>
+          <a:xfrm>
+            <a:off x="6108192" y="5815584"/>
+            <a:ext cx="5370271" cy="347472"/>
+          </a:xfrm>
+          <a:prstGeom prst="rect">
+            <a:avLst/>
+          </a:prstGeom>
+          <a:noFill/>
+          <a:ln/>
+        </p:spPr>
+        <p:txBody>
+          <a:bodyPr wrap="square" lIns="0" tIns="0" rIns="0" bIns="0" rtlCol="0" anchor="ctr"/>
+          <a:lstStyle/>
+          <a:p>
+            <a:pPr algn="l" indent="0" marL="0">
+              <a:buNone/>
+            </a:pPr>
+            <a:r>
+              <a:rPr lang="en-US" sz="880" i="1" dirty="0">
+                <a:solidFill>
+                  <a:srgbClr val="9FB6D4"/>
+                </a:solidFill>
+                <a:latin typeface="Microsoft YaHei" pitchFamily="34" charset="0"/>
+                <a:ea typeface="Microsoft YaHei" pitchFamily="34" charset="-122"/>
+                <a:cs typeface="Microsoft YaHei" pitchFamily="34" charset="-120"/>
+              </a:rPr>
+              <a:t>红线：不做 SAP GUI 自动点击；不让模型猜未登记的 TCode/表直接执行——所有能力先登记、后使用。</a:t>
+            </a:r>
+            <a:endParaRPr lang="en-US" sz="880" dirty="0"/>
           </a:p>
         </p:txBody>
       </p:sp>
@@ -9567,7 +9819,7 @@
                 <a:ea typeface="Microsoft YaHei" pitchFamily="34" charset="-122"/>
                 <a:cs typeface="Microsoft YaHei" pitchFamily="34" charset="-120"/>
               </a:rPr>
-              <a:t>按方向推进：流式输出 → 知识库混合 → 目录自助登记</a:t>
+              <a:t>沿业务路线推进：模块接入 → 报表生态 → 任务中心</a:t>
             </a:r>
             <a:endParaRPr lang="en-US" sz="1050" dirty="0"/>
           </a:p>

--- a/发布文档/SAP-AI对话助手-项目介绍-V2.0.pptx
+++ b/发布文档/SAP-AI对话助手-项目介绍-V2.0.pptx
@@ -861,7 +861,7 @@
           <a:p>
             <a:r>
               <a:rPr lang="en-US" dirty="0"/>
-              <a:t>逐条念分并给理由：分高的是边界窄而可信的场景；分低的共同原因是依赖登记清单与网关兼容。总评 8.1。特别说明：评分与所用模型强相关，换更强模型代码/数据分析还能涨（加模型=加一行配置）。</a:t>
+              <a:t>逐条念分并给理由：分高的是边界窄而可信的场景；分低的共同原因是依赖登记清单与网关兼容。总评 8.0。特别说明：评分与所用模型强相关，换更强模型代码/数据分析还能涨（加模型=加一行配置）。</a:t>
             </a:r>
             <a:endParaRPr lang="en-US" dirty="0"/>
           </a:p>
@@ -1125,7 +1125,7 @@
           <a:p>
             <a:r>
               <a:rPr lang="en-US" dirty="0"/>
-              <a:t>收尾一句话+三步走：上线→测基线→沿业务路线迭代。</a:t>
+              <a:t>收尾一句话+三步走：上线→试点→沿业务路线迭代。</a:t>
             </a:r>
             <a:endParaRPr lang="en-US" dirty="0"/>
           </a:p>
@@ -5865,8 +5865,8 @@
         </p:nvSpPr>
         <p:spPr>
           <a:xfrm>
-            <a:off x="457200" y="1600200"/>
-            <a:ext cx="1965960" cy="658368"/>
+            <a:off x="457200" y="1783080"/>
+            <a:ext cx="1965960" cy="731520"/>
           </a:xfrm>
           <a:prstGeom prst="rect">
             <a:avLst/>
@@ -5904,7 +5904,7 @@
         </p:nvSpPr>
         <p:spPr>
           <a:xfrm>
-            <a:off x="2514600" y="1837944"/>
+            <a:off x="2514600" y="2057400"/>
             <a:ext cx="3017520" cy="182880"/>
           </a:xfrm>
           <a:prstGeom prst="roundRect">
@@ -5926,7 +5926,7 @@
         </p:nvSpPr>
         <p:spPr>
           <a:xfrm>
-            <a:off x="2514600" y="1837944"/>
+            <a:off x="2514600" y="2057400"/>
             <a:ext cx="2715768" cy="182880"/>
           </a:xfrm>
           <a:prstGeom prst="roundRect">
@@ -5948,8 +5948,8 @@
         </p:nvSpPr>
         <p:spPr>
           <a:xfrm>
-            <a:off x="5641848" y="1600200"/>
-            <a:ext cx="777240" cy="658368"/>
+            <a:off x="5641848" y="1783080"/>
+            <a:ext cx="777240" cy="731520"/>
           </a:xfrm>
           <a:prstGeom prst="rect">
             <a:avLst/>
@@ -5987,8 +5987,8 @@
         </p:nvSpPr>
         <p:spPr>
           <a:xfrm>
-            <a:off x="6583680" y="1600200"/>
-            <a:ext cx="5212080" cy="658368"/>
+            <a:off x="6583680" y="1783080"/>
+            <a:ext cx="5212080" cy="731520"/>
           </a:xfrm>
           <a:prstGeom prst="rect">
             <a:avLst/>
@@ -6029,8 +6029,8 @@
         </p:nvSpPr>
         <p:spPr>
           <a:xfrm>
-            <a:off x="457200" y="2258568"/>
-            <a:ext cx="1965960" cy="658368"/>
+            <a:off x="457200" y="2514600"/>
+            <a:ext cx="1965960" cy="731520"/>
           </a:xfrm>
           <a:prstGeom prst="rect">
             <a:avLst/>
@@ -6054,7 +6054,7 @@
                 <a:ea typeface="Microsoft YaHei" pitchFamily="34" charset="-122"/>
                 <a:cs typeface="Microsoft YaHei" pitchFamily="34" charset="-120"/>
               </a:rPr>
-              <a:t>Agent 测评（管理）</a:t>
+              <a:t>代码分析</a:t>
             </a:r>
             <a:endParaRPr lang="en-US" sz="1250" dirty="0"/>
           </a:p>
@@ -6068,7 +6068,7 @@
         </p:nvSpPr>
         <p:spPr>
           <a:xfrm>
-            <a:off x="2514600" y="2496312"/>
+            <a:off x="2514600" y="2788920"/>
             <a:ext cx="3017520" cy="182880"/>
           </a:xfrm>
           <a:prstGeom prst="roundRect">
@@ -6090,8 +6090,8 @@
         </p:nvSpPr>
         <p:spPr>
           <a:xfrm>
-            <a:off x="2514600" y="2496312"/>
-            <a:ext cx="2564892" cy="182880"/>
+            <a:off x="2514600" y="2788920"/>
+            <a:ext cx="2414016" cy="182880"/>
           </a:xfrm>
           <a:prstGeom prst="roundRect">
             <a:avLst>
@@ -6099,7 +6099,7 @@
             </a:avLst>
           </a:prstGeom>
           <a:solidFill>
-            <a:srgbClr val="1E7D32"/>
+            <a:srgbClr val="0A6ED1"/>
           </a:solidFill>
           <a:ln/>
         </p:spPr>
@@ -6112,8 +6112,8 @@
         </p:nvSpPr>
         <p:spPr>
           <a:xfrm>
-            <a:off x="5641848" y="2258568"/>
-            <a:ext cx="777240" cy="658368"/>
+            <a:off x="5641848" y="2514600"/>
+            <a:ext cx="777240" cy="731520"/>
           </a:xfrm>
           <a:prstGeom prst="rect">
             <a:avLst/>
@@ -6131,13 +6131,13 @@
             <a:r>
               <a:rPr lang="en-US" sz="1400" b="1" dirty="0">
                 <a:solidFill>
-                  <a:srgbClr val="1E7D32"/>
-                </a:solidFill>
-                <a:latin typeface="Microsoft YaHei" pitchFamily="34" charset="0"/>
-                <a:ea typeface="Microsoft YaHei" pitchFamily="34" charset="-122"/>
-                <a:cs typeface="Microsoft YaHei" pitchFamily="34" charset="-120"/>
-              </a:rPr>
-              <a:t>8.5</a:t>
+                  <a:srgbClr val="0A6ED1"/>
+                </a:solidFill>
+                <a:latin typeface="Microsoft YaHei" pitchFamily="34" charset="0"/>
+                <a:ea typeface="Microsoft YaHei" pitchFamily="34" charset="-122"/>
+                <a:cs typeface="Microsoft YaHei" pitchFamily="34" charset="-120"/>
+              </a:rPr>
+              <a:t>8.0</a:t>
             </a:r>
             <a:endParaRPr lang="en-US" sz="1400" dirty="0"/>
           </a:p>
@@ -6151,8 +6151,8 @@
         </p:nvSpPr>
         <p:spPr>
           <a:xfrm>
-            <a:off x="6583680" y="2258568"/>
-            <a:ext cx="5212080" cy="658368"/>
+            <a:off x="6583680" y="2514600"/>
+            <a:ext cx="5212080" cy="731520"/>
           </a:xfrm>
           <a:prstGeom prst="rect">
             <a:avLst/>
@@ -6179,7 +6179,7 @@
                 <a:ea typeface="Microsoft YaHei" pitchFamily="34" charset="-122"/>
                 <a:cs typeface="Microsoft YaHei" pitchFamily="34" charset="-120"/>
               </a:rPr>
-              <a:t>工程亮点：29 题走真实链路、先测再改；题量还小，未成回归门禁</a:t>
+              <a:t>能读能讲：Z/Y 源码分页读取含 INCLUDE；标准对象读不了，没有跨对象引用分析</a:t>
             </a:r>
             <a:endParaRPr lang="en-US" sz="980" dirty="0"/>
           </a:p>
@@ -6193,8 +6193,8 @@
         </p:nvSpPr>
         <p:spPr>
           <a:xfrm>
-            <a:off x="457200" y="2916936"/>
-            <a:ext cx="1965960" cy="658368"/>
+            <a:off x="457200" y="3246120"/>
+            <a:ext cx="1965960" cy="731520"/>
           </a:xfrm>
           <a:prstGeom prst="rect">
             <a:avLst/>
@@ -6218,7 +6218,7 @@
                 <a:ea typeface="Microsoft YaHei" pitchFamily="34" charset="-122"/>
                 <a:cs typeface="Microsoft YaHei" pitchFamily="34" charset="-120"/>
               </a:rPr>
-              <a:t>代码分析</a:t>
+              <a:t>数据分析</a:t>
             </a:r>
             <a:endParaRPr lang="en-US" sz="1250" dirty="0"/>
           </a:p>
@@ -6232,7 +6232,7 @@
         </p:nvSpPr>
         <p:spPr>
           <a:xfrm>
-            <a:off x="2514600" y="3154680"/>
+            <a:off x="2514600" y="3520440"/>
             <a:ext cx="3017520" cy="182880"/>
           </a:xfrm>
           <a:prstGeom prst="roundRect">
@@ -6254,7 +6254,7 @@
         </p:nvSpPr>
         <p:spPr>
           <a:xfrm>
-            <a:off x="2514600" y="3154680"/>
+            <a:off x="2514600" y="3520440"/>
             <a:ext cx="2414016" cy="182880"/>
           </a:xfrm>
           <a:prstGeom prst="roundRect">
@@ -6276,8 +6276,8 @@
         </p:nvSpPr>
         <p:spPr>
           <a:xfrm>
-            <a:off x="5641848" y="2916936"/>
-            <a:ext cx="777240" cy="658368"/>
+            <a:off x="5641848" y="3246120"/>
+            <a:ext cx="777240" cy="731520"/>
           </a:xfrm>
           <a:prstGeom prst="rect">
             <a:avLst/>
@@ -6315,8 +6315,8 @@
         </p:nvSpPr>
         <p:spPr>
           <a:xfrm>
-            <a:off x="6583680" y="2916936"/>
-            <a:ext cx="5212080" cy="658368"/>
+            <a:off x="6583680" y="3246120"/>
+            <a:ext cx="5212080" cy="731520"/>
           </a:xfrm>
           <a:prstGeom prst="rect">
             <a:avLst/>
@@ -6343,7 +6343,7 @@
                 <a:ea typeface="Microsoft YaHei" pitchFamily="34" charset="-122"/>
                 <a:cs typeface="Microsoft YaHei" pitchFamily="34" charset="-120"/>
               </a:rPr>
-              <a:t>能读能讲：Z/Y 源码分页读取含 INCLUDE；标准对象读不了，没有跨对象引用分析</a:t>
+              <a:t>目录内很稳：查询计划受控、图表自动出；目录外要管理员登记，图表仅柱/线/饼</a:t>
             </a:r>
             <a:endParaRPr lang="en-US" sz="980" dirty="0"/>
           </a:p>
@@ -6357,8 +6357,8 @@
         </p:nvSpPr>
         <p:spPr>
           <a:xfrm>
-            <a:off x="457200" y="3575304"/>
-            <a:ext cx="1965960" cy="658368"/>
+            <a:off x="457200" y="3977640"/>
+            <a:ext cx="1965960" cy="731520"/>
           </a:xfrm>
           <a:prstGeom prst="rect">
             <a:avLst/>
@@ -6382,7 +6382,7 @@
                 <a:ea typeface="Microsoft YaHei" pitchFamily="34" charset="-122"/>
                 <a:cs typeface="Microsoft YaHei" pitchFamily="34" charset="-120"/>
               </a:rPr>
-              <a:t>数据分析</a:t>
+              <a:t>报表执行</a:t>
             </a:r>
             <a:endParaRPr lang="en-US" sz="1250" dirty="0"/>
           </a:p>
@@ -6396,7 +6396,7 @@
         </p:nvSpPr>
         <p:spPr>
           <a:xfrm>
-            <a:off x="2514600" y="3813048"/>
+            <a:off x="2514600" y="4251960"/>
             <a:ext cx="3017520" cy="182880"/>
           </a:xfrm>
           <a:prstGeom prst="roundRect">
@@ -6418,8 +6418,8 @@
         </p:nvSpPr>
         <p:spPr>
           <a:xfrm>
-            <a:off x="2514600" y="3813048"/>
-            <a:ext cx="2414016" cy="182880"/>
+            <a:off x="2514600" y="4251960"/>
+            <a:ext cx="2112264" cy="182880"/>
           </a:xfrm>
           <a:prstGeom prst="roundRect">
             <a:avLst>
@@ -6427,7 +6427,7 @@
             </a:avLst>
           </a:prstGeom>
           <a:solidFill>
-            <a:srgbClr val="0A6ED1"/>
+            <a:srgbClr val="C46A15"/>
           </a:solidFill>
           <a:ln/>
         </p:spPr>
@@ -6440,8 +6440,8 @@
         </p:nvSpPr>
         <p:spPr>
           <a:xfrm>
-            <a:off x="5641848" y="3575304"/>
-            <a:ext cx="777240" cy="658368"/>
+            <a:off x="5641848" y="3977640"/>
+            <a:ext cx="777240" cy="731520"/>
           </a:xfrm>
           <a:prstGeom prst="rect">
             <a:avLst/>
@@ -6459,13 +6459,13 @@
             <a:r>
               <a:rPr lang="en-US" sz="1400" b="1" dirty="0">
                 <a:solidFill>
-                  <a:srgbClr val="0A6ED1"/>
-                </a:solidFill>
-                <a:latin typeface="Microsoft YaHei" pitchFamily="34" charset="0"/>
-                <a:ea typeface="Microsoft YaHei" pitchFamily="34" charset="-122"/>
-                <a:cs typeface="Microsoft YaHei" pitchFamily="34" charset="-120"/>
-              </a:rPr>
-              <a:t>8.0</a:t>
+                  <a:srgbClr val="C46A15"/>
+                </a:solidFill>
+                <a:latin typeface="Microsoft YaHei" pitchFamily="34" charset="0"/>
+                <a:ea typeface="Microsoft YaHei" pitchFamily="34" charset="-122"/>
+                <a:cs typeface="Microsoft YaHei" pitchFamily="34" charset="-120"/>
+              </a:rPr>
+              <a:t>7.0</a:t>
             </a:r>
             <a:endParaRPr lang="en-US" sz="1400" dirty="0"/>
           </a:p>
@@ -6479,8 +6479,8 @@
         </p:nvSpPr>
         <p:spPr>
           <a:xfrm>
-            <a:off x="6583680" y="3575304"/>
-            <a:ext cx="5212080" cy="658368"/>
+            <a:off x="6583680" y="3977640"/>
+            <a:ext cx="5212080" cy="731520"/>
           </a:xfrm>
           <a:prstGeom prst="rect">
             <a:avLst/>
@@ -6507,7 +6507,7 @@
                 <a:ea typeface="Microsoft YaHei" pitchFamily="34" charset="-122"/>
                 <a:cs typeface="Microsoft YaHei" pitchFamily="34" charset="-120"/>
               </a:rPr>
-              <a:t>目录内很稳：查询计划受控、图表自动出；目录外要管理员登记，图表仅柱/线/饼</a:t>
+              <a:t>跑得动、能追问：只支持登记过的 TCode；写参数存在网关兼容问题，异步等待体验一般</a:t>
             </a:r>
             <a:endParaRPr lang="en-US" sz="980" dirty="0"/>
           </a:p>
@@ -6515,171 +6515,7 @@
       </p:sp>
       <p:sp>
         <p:nvSpPr>
-          <p:cNvPr id="27" name="Text 25"/>
-          <p:cNvSpPr/>
-          <p:nvPr/>
-        </p:nvSpPr>
-        <p:spPr>
-          <a:xfrm>
-            <a:off x="457200" y="4233672"/>
-            <a:ext cx="1965960" cy="658368"/>
-          </a:xfrm>
-          <a:prstGeom prst="rect">
-            <a:avLst/>
-          </a:prstGeom>
-          <a:noFill/>
-          <a:ln/>
-        </p:spPr>
-        <p:txBody>
-          <a:bodyPr wrap="square" lIns="0" tIns="0" rIns="0" bIns="0" rtlCol="0" anchor="ctr"/>
-          <a:lstStyle/>
-          <a:p>
-            <a:pPr algn="l" indent="0" marL="0">
-              <a:buNone/>
-            </a:pPr>
-            <a:r>
-              <a:rPr lang="en-US" sz="1250" b="1" dirty="0">
-                <a:solidFill>
-                  <a:srgbClr val="24303C"/>
-                </a:solidFill>
-                <a:latin typeface="Microsoft YaHei" pitchFamily="34" charset="0"/>
-                <a:ea typeface="Microsoft YaHei" pitchFamily="34" charset="-122"/>
-                <a:cs typeface="Microsoft YaHei" pitchFamily="34" charset="-120"/>
-              </a:rPr>
-              <a:t>报表执行</a:t>
-            </a:r>
-            <a:endParaRPr lang="en-US" sz="1250" dirty="0"/>
-          </a:p>
-        </p:txBody>
-      </p:sp>
-      <p:sp>
-        <p:nvSpPr>
-          <p:cNvPr id="28" name="Shape 26"/>
-          <p:cNvSpPr/>
-          <p:nvPr/>
-        </p:nvSpPr>
-        <p:spPr>
-          <a:xfrm>
-            <a:off x="2514600" y="4471416"/>
-            <a:ext cx="3017520" cy="182880"/>
-          </a:xfrm>
-          <a:prstGeom prst="roundRect">
-            <a:avLst>
-              <a:gd name="adj" fmla="val 50000"/>
-            </a:avLst>
-          </a:prstGeom>
-          <a:solidFill>
-            <a:srgbClr val="E7EEF6"/>
-          </a:solidFill>
-          <a:ln/>
-        </p:spPr>
-      </p:sp>
-      <p:sp>
-        <p:nvSpPr>
-          <p:cNvPr id="29" name="Shape 27"/>
-          <p:cNvSpPr/>
-          <p:nvPr/>
-        </p:nvSpPr>
-        <p:spPr>
-          <a:xfrm>
-            <a:off x="2514600" y="4471416"/>
-            <a:ext cx="2112264" cy="182880"/>
-          </a:xfrm>
-          <a:prstGeom prst="roundRect">
-            <a:avLst>
-              <a:gd name="adj" fmla="val 50000"/>
-            </a:avLst>
-          </a:prstGeom>
-          <a:solidFill>
-            <a:srgbClr val="C46A15"/>
-          </a:solidFill>
-          <a:ln/>
-        </p:spPr>
-      </p:sp>
-      <p:sp>
-        <p:nvSpPr>
-          <p:cNvPr id="30" name="Text 28"/>
-          <p:cNvSpPr/>
-          <p:nvPr/>
-        </p:nvSpPr>
-        <p:spPr>
-          <a:xfrm>
-            <a:off x="5641848" y="4233672"/>
-            <a:ext cx="777240" cy="658368"/>
-          </a:xfrm>
-          <a:prstGeom prst="rect">
-            <a:avLst/>
-          </a:prstGeom>
-          <a:noFill/>
-          <a:ln/>
-        </p:spPr>
-        <p:txBody>
-          <a:bodyPr wrap="square" lIns="0" tIns="0" rIns="0" bIns="0" rtlCol="0" anchor="ctr"/>
-          <a:lstStyle/>
-          <a:p>
-            <a:pPr algn="l" indent="0" marL="0">
-              <a:buNone/>
-            </a:pPr>
-            <a:r>
-              <a:rPr lang="en-US" sz="1400" b="1" dirty="0">
-                <a:solidFill>
-                  <a:srgbClr val="C46A15"/>
-                </a:solidFill>
-                <a:latin typeface="Microsoft YaHei" pitchFamily="34" charset="0"/>
-                <a:ea typeface="Microsoft YaHei" pitchFamily="34" charset="-122"/>
-                <a:cs typeface="Microsoft YaHei" pitchFamily="34" charset="-120"/>
-              </a:rPr>
-              <a:t>7.0</a:t>
-            </a:r>
-            <a:endParaRPr lang="en-US" sz="1400" dirty="0"/>
-          </a:p>
-        </p:txBody>
-      </p:sp>
-      <p:sp>
-        <p:nvSpPr>
-          <p:cNvPr id="31" name="Text 29"/>
-          <p:cNvSpPr/>
-          <p:nvPr/>
-        </p:nvSpPr>
-        <p:spPr>
-          <a:xfrm>
-            <a:off x="6583680" y="4233672"/>
-            <a:ext cx="5212080" cy="658368"/>
-          </a:xfrm>
-          <a:prstGeom prst="rect">
-            <a:avLst/>
-          </a:prstGeom>
-          <a:noFill/>
-          <a:ln/>
-        </p:spPr>
-        <p:txBody>
-          <a:bodyPr wrap="square" lIns="0" tIns="0" rIns="0" bIns="0" rtlCol="0" anchor="ctr"/>
-          <a:lstStyle/>
-          <a:p>
-            <a:pPr algn="l" indent="0" marL="0">
-              <a:lnSpc>
-                <a:spcPct val="110000"/>
-              </a:lnSpc>
-              <a:buNone/>
-            </a:pPr>
-            <a:r>
-              <a:rPr lang="en-US" sz="980" dirty="0">
-                <a:solidFill>
-                  <a:srgbClr val="5F7183"/>
-                </a:solidFill>
-                <a:latin typeface="Microsoft YaHei" pitchFamily="34" charset="0"/>
-                <a:ea typeface="Microsoft YaHei" pitchFamily="34" charset="-122"/>
-                <a:cs typeface="Microsoft YaHei" pitchFamily="34" charset="-120"/>
-              </a:rPr>
-              <a:t>跑得动、能追问：只支持登记过的 TCode；写参数存在网关兼容问题，异步等待体验一般</a:t>
-            </a:r>
-            <a:endParaRPr lang="en-US" sz="980" dirty="0"/>
-          </a:p>
-        </p:txBody>
-      </p:sp>
-      <p:sp>
-        <p:nvSpPr>
-          <p:cNvPr id="32" name="Shape 30"/>
+          <p:cNvPr id="27" name="Shape 25"/>
           <p:cNvSpPr/>
           <p:nvPr/>
         </p:nvSpPr>
@@ -6706,7 +6542,7 @@
       </p:sp>
       <p:sp>
         <p:nvSpPr>
-          <p:cNvPr id="33" name="Text 31"/>
+          <p:cNvPr id="28" name="Text 26"/>
           <p:cNvSpPr/>
           <p:nvPr/>
         </p:nvSpPr>
@@ -6740,7 +6576,7 @@
                 <a:ea typeface="Microsoft YaHei" pitchFamily="34" charset="-122"/>
                 <a:cs typeface="Microsoft YaHei" pitchFamily="34" charset="-120"/>
               </a:rPr>
-              <a:t>总评：综合 8.1 / 10。</a:t>
+              <a:t>总评：综合 8.0 / 10。</a:t>
             </a:r>
             <a:r>
               <a:rPr lang="en-US" sz="1150" dirty="0">
@@ -7974,7 +7810,7 @@
                 <a:ea typeface="Microsoft YaHei" pitchFamily="34" charset="-122"/>
                 <a:cs typeface="Microsoft YaHei" pitchFamily="34" charset="-120"/>
               </a:rPr>
-              <a:t>只接一套 S/4（client 470）；测评题库 29 题覆盖有限，复杂分析场景未充分验证</a:t>
+              <a:t>只接一套 S/4（client 470）；复杂分析场景未充分验证，发版靠人工逐项核对</a:t>
             </a:r>
             <a:endParaRPr lang="en-US" sz="1000" dirty="0"/>
           </a:p>
@@ -9336,7 +9172,7 @@
                 <a:ea typeface="Microsoft YaHei" pitchFamily="34" charset="-122"/>
                 <a:cs typeface="Microsoft YaHei" pitchFamily="34" charset="-120"/>
               </a:rPr>
-              <a:t>先测，再改；只读起步，逐步开放</a:t>
+              <a:t>小步快跑，只读起步，逐步开放</a:t>
             </a:r>
             <a:endParaRPr lang="en-US" sz="3400" dirty="0"/>
           </a:p>
@@ -9630,7 +9466,7 @@
                 <a:ea typeface="Microsoft YaHei" pitchFamily="34" charset="-122"/>
                 <a:cs typeface="Microsoft YaHei" pitchFamily="34" charset="-120"/>
               </a:rPr>
-              <a:t>测基线</a:t>
+              <a:t>试点</a:t>
             </a:r>
             <a:endParaRPr lang="en-US" sz="1500" dirty="0"/>
           </a:p>
@@ -9672,7 +9508,7 @@
                 <a:ea typeface="Microsoft YaHei" pitchFamily="34" charset="-122"/>
                 <a:cs typeface="Microsoft YaHei" pitchFamily="34" charset="-120"/>
               </a:rPr>
-              <a:t>29 题测评跑基线并存档，后续每次改动对比通过率</a:t>
+              <a:t>先向开发与顾问小范围开放，收集高频问题排优先级</a:t>
             </a:r>
             <a:endParaRPr lang="en-US" sz="1050" dirty="0"/>
           </a:p>
